--- a/HomeWorks/homework1/images.pptx
+++ b/HomeWorks/homework1/images.pptx
@@ -7,6 +7,8 @@
   <p:sldIdLst>
     <p:sldId id="256" r:id="rId2"/>
     <p:sldId id="257" r:id="rId3"/>
+    <p:sldId id="258" r:id="rId4"/>
+    <p:sldId id="259" r:id="rId5"/>
   </p:sldIdLst>
   <p:sldSz cx="12192000" cy="6858000"/>
   <p:notesSz cx="6858000" cy="9144000"/>
@@ -105,6 +107,11 @@
       </a:defRPr>
     </a:lvl9pPr>
   </p:defaultTextStyle>
+  <p:extLst>
+    <p:ext uri="{EFAFB233-063F-42B5-8137-9DF3F51BA10A}">
+      <p15:sldGuideLst xmlns:p15="http://schemas.microsoft.com/office/powerpoint/2012/main"/>
+    </p:ext>
+  </p:extLst>
 </p:presentation>
 </file>
 
@@ -257,7 +264,7 @@
           <a:p>
             <a:fld id="{322E4AA4-BEDE-CB44-B2CC-66E1D385BA6A}" type="datetimeFigureOut">
               <a:rPr lang="en-CN" smtClean="0"/>
-              <a:t>2024/12/8</a:t>
+              <a:t>2024/12/9</a:t>
             </a:fld>
             <a:endParaRPr lang="en-CN"/>
           </a:p>
@@ -457,7 +464,7 @@
           <a:p>
             <a:fld id="{322E4AA4-BEDE-CB44-B2CC-66E1D385BA6A}" type="datetimeFigureOut">
               <a:rPr lang="en-CN" smtClean="0"/>
-              <a:t>2024/12/8</a:t>
+              <a:t>2024/12/9</a:t>
             </a:fld>
             <a:endParaRPr lang="en-CN"/>
           </a:p>
@@ -667,7 +674,7 @@
           <a:p>
             <a:fld id="{322E4AA4-BEDE-CB44-B2CC-66E1D385BA6A}" type="datetimeFigureOut">
               <a:rPr lang="en-CN" smtClean="0"/>
-              <a:t>2024/12/8</a:t>
+              <a:t>2024/12/9</a:t>
             </a:fld>
             <a:endParaRPr lang="en-CN"/>
           </a:p>
@@ -867,7 +874,7 @@
           <a:p>
             <a:fld id="{322E4AA4-BEDE-CB44-B2CC-66E1D385BA6A}" type="datetimeFigureOut">
               <a:rPr lang="en-CN" smtClean="0"/>
-              <a:t>2024/12/8</a:t>
+              <a:t>2024/12/9</a:t>
             </a:fld>
             <a:endParaRPr lang="en-CN"/>
           </a:p>
@@ -1143,7 +1150,7 @@
           <a:p>
             <a:fld id="{322E4AA4-BEDE-CB44-B2CC-66E1D385BA6A}" type="datetimeFigureOut">
               <a:rPr lang="en-CN" smtClean="0"/>
-              <a:t>2024/12/8</a:t>
+              <a:t>2024/12/9</a:t>
             </a:fld>
             <a:endParaRPr lang="en-CN"/>
           </a:p>
@@ -1411,7 +1418,7 @@
           <a:p>
             <a:fld id="{322E4AA4-BEDE-CB44-B2CC-66E1D385BA6A}" type="datetimeFigureOut">
               <a:rPr lang="en-CN" smtClean="0"/>
-              <a:t>2024/12/8</a:t>
+              <a:t>2024/12/9</a:t>
             </a:fld>
             <a:endParaRPr lang="en-CN"/>
           </a:p>
@@ -1826,7 +1833,7 @@
           <a:p>
             <a:fld id="{322E4AA4-BEDE-CB44-B2CC-66E1D385BA6A}" type="datetimeFigureOut">
               <a:rPr lang="en-CN" smtClean="0"/>
-              <a:t>2024/12/8</a:t>
+              <a:t>2024/12/9</a:t>
             </a:fld>
             <a:endParaRPr lang="en-CN"/>
           </a:p>
@@ -1968,7 +1975,7 @@
           <a:p>
             <a:fld id="{322E4AA4-BEDE-CB44-B2CC-66E1D385BA6A}" type="datetimeFigureOut">
               <a:rPr lang="en-CN" smtClean="0"/>
-              <a:t>2024/12/8</a:t>
+              <a:t>2024/12/9</a:t>
             </a:fld>
             <a:endParaRPr lang="en-CN"/>
           </a:p>
@@ -2081,7 +2088,7 @@
           <a:p>
             <a:fld id="{322E4AA4-BEDE-CB44-B2CC-66E1D385BA6A}" type="datetimeFigureOut">
               <a:rPr lang="en-CN" smtClean="0"/>
-              <a:t>2024/12/8</a:t>
+              <a:t>2024/12/9</a:t>
             </a:fld>
             <a:endParaRPr lang="en-CN"/>
           </a:p>
@@ -2394,7 +2401,7 @@
           <a:p>
             <a:fld id="{322E4AA4-BEDE-CB44-B2CC-66E1D385BA6A}" type="datetimeFigureOut">
               <a:rPr lang="en-CN" smtClean="0"/>
-              <a:t>2024/12/8</a:t>
+              <a:t>2024/12/9</a:t>
             </a:fld>
             <a:endParaRPr lang="en-CN"/>
           </a:p>
@@ -2683,7 +2690,7 @@
           <a:p>
             <a:fld id="{322E4AA4-BEDE-CB44-B2CC-66E1D385BA6A}" type="datetimeFigureOut">
               <a:rPr lang="en-CN" smtClean="0"/>
-              <a:t>2024/12/8</a:t>
+              <a:t>2024/12/9</a:t>
             </a:fld>
             <a:endParaRPr lang="en-CN"/>
           </a:p>
@@ -2926,7 +2933,7 @@
           <a:p>
             <a:fld id="{322E4AA4-BEDE-CB44-B2CC-66E1D385BA6A}" type="datetimeFigureOut">
               <a:rPr lang="en-CN" smtClean="0"/>
-              <a:t>2024/12/8</a:t>
+              <a:t>2024/12/9</a:t>
             </a:fld>
             <a:endParaRPr lang="en-CN"/>
           </a:p>
@@ -4448,12 +4455,3057 @@
           <a:chExt cx="0" cy="0"/>
         </a:xfrm>
       </p:grpSpPr>
+      <p:sp>
+        <p:nvSpPr>
+          <p:cNvPr id="5" name="Rectangle 4">
+            <a:extLst>
+              <a:ext uri="{FF2B5EF4-FFF2-40B4-BE49-F238E27FC236}">
+                <a16:creationId xmlns:a16="http://schemas.microsoft.com/office/drawing/2014/main" id="{56239B50-8E64-4A42-A81C-147CDEA846C1}"/>
+              </a:ext>
+            </a:extLst>
+          </p:cNvPr>
+          <p:cNvSpPr/>
+          <p:nvPr/>
+        </p:nvSpPr>
+        <p:spPr>
+          <a:xfrm>
+            <a:off x="266218" y="2369241"/>
+            <a:ext cx="2550289" cy="646495"/>
+          </a:xfrm>
+          <a:prstGeom prst="rect">
+            <a:avLst/>
+          </a:prstGeom>
+          <a:solidFill>
+            <a:schemeClr val="accent6">
+              <a:lumMod val="20000"/>
+              <a:lumOff val="80000"/>
+            </a:schemeClr>
+          </a:solidFill>
+          <a:ln w="19050">
+            <a:solidFill>
+              <a:schemeClr val="tx1"/>
+            </a:solidFill>
+            <a:prstDash val="dash"/>
+          </a:ln>
+          <a:effectLst>
+            <a:outerShdw blurRad="50800" dist="38100" dir="2700000" algn="tl" rotWithShape="0">
+              <a:prstClr val="black">
+                <a:alpha val="40000"/>
+              </a:prstClr>
+            </a:outerShdw>
+          </a:effectLst>
+        </p:spPr>
+        <p:style>
+          <a:lnRef idx="2">
+            <a:schemeClr val="accent1">
+              <a:shade val="50000"/>
+            </a:schemeClr>
+          </a:lnRef>
+          <a:fillRef idx="1">
+            <a:schemeClr val="accent1"/>
+          </a:fillRef>
+          <a:effectRef idx="0">
+            <a:schemeClr val="accent1"/>
+          </a:effectRef>
+          <a:fontRef idx="minor">
+            <a:schemeClr val="lt1"/>
+          </a:fontRef>
+        </p:style>
+        <p:txBody>
+          <a:bodyPr rtlCol="0" anchor="ctr"/>
+          <a:lstStyle/>
+          <a:p>
+            <a:pPr algn="ctr"/>
+            <a:r>
+              <a:rPr lang="en-CN" b="1" dirty="0">
+                <a:solidFill>
+                  <a:schemeClr val="tx1"/>
+                </a:solidFill>
+                <a:latin typeface="Times New Roman" panose="02020603050405020304" pitchFamily="18" charset="0"/>
+                <a:cs typeface="Times New Roman" panose="02020603050405020304" pitchFamily="18" charset="0"/>
+              </a:rPr>
+              <a:t>PBOC</a:t>
+            </a:r>
+          </a:p>
+        </p:txBody>
+      </p:sp>
+      <p:sp>
+        <p:nvSpPr>
+          <p:cNvPr id="6" name="Rectangle 5">
+            <a:extLst>
+              <a:ext uri="{FF2B5EF4-FFF2-40B4-BE49-F238E27FC236}">
+                <a16:creationId xmlns:a16="http://schemas.microsoft.com/office/drawing/2014/main" id="{DE7DD7D9-714D-7E46-8E93-175F36825184}"/>
+              </a:ext>
+            </a:extLst>
+          </p:cNvPr>
+          <p:cNvSpPr/>
+          <p:nvPr/>
+        </p:nvSpPr>
+        <p:spPr>
+          <a:xfrm>
+            <a:off x="4820854" y="2369241"/>
+            <a:ext cx="2550289" cy="646495"/>
+          </a:xfrm>
+          <a:prstGeom prst="rect">
+            <a:avLst/>
+          </a:prstGeom>
+          <a:solidFill>
+            <a:schemeClr val="accent6">
+              <a:lumMod val="20000"/>
+              <a:lumOff val="80000"/>
+            </a:schemeClr>
+          </a:solidFill>
+          <a:ln w="19050">
+            <a:solidFill>
+              <a:schemeClr val="tx1"/>
+            </a:solidFill>
+            <a:prstDash val="dash"/>
+          </a:ln>
+          <a:effectLst>
+            <a:outerShdw blurRad="50800" dist="38100" dir="2700000" algn="tl" rotWithShape="0">
+              <a:prstClr val="black">
+                <a:alpha val="40000"/>
+              </a:prstClr>
+            </a:outerShdw>
+          </a:effectLst>
+        </p:spPr>
+        <p:style>
+          <a:lnRef idx="2">
+            <a:schemeClr val="accent1">
+              <a:shade val="50000"/>
+            </a:schemeClr>
+          </a:lnRef>
+          <a:fillRef idx="1">
+            <a:schemeClr val="accent1"/>
+          </a:fillRef>
+          <a:effectRef idx="0">
+            <a:schemeClr val="accent1"/>
+          </a:effectRef>
+          <a:fontRef idx="minor">
+            <a:schemeClr val="lt1"/>
+          </a:fontRef>
+        </p:style>
+        <p:txBody>
+          <a:bodyPr rtlCol="0" anchor="ctr"/>
+          <a:lstStyle/>
+          <a:p>
+            <a:pPr algn="ctr"/>
+            <a:r>
+              <a:rPr lang="en-US" sz="1800" b="1" dirty="0">
+                <a:solidFill>
+                  <a:srgbClr val="000000"/>
+                </a:solidFill>
+                <a:effectLst/>
+                <a:latin typeface="Times New Roman" panose="02020603050405020304" pitchFamily="18" charset="0"/>
+                <a:ea typeface="KaiTi" panose="02010609060101010101" pitchFamily="49" charset="-122"/>
+              </a:rPr>
+              <a:t>Securities, Funds and Insurance Companies</a:t>
+            </a:r>
+            <a:r>
+              <a:rPr lang="en-CN" b="1" dirty="0">
+                <a:effectLst/>
+              </a:rPr>
+              <a:t> </a:t>
+            </a:r>
+            <a:endParaRPr lang="en-CN" b="1" dirty="0">
+              <a:solidFill>
+                <a:schemeClr val="tx1"/>
+              </a:solidFill>
+              <a:latin typeface="Times New Roman" panose="02020603050405020304" pitchFamily="18" charset="0"/>
+              <a:cs typeface="Times New Roman" panose="02020603050405020304" pitchFamily="18" charset="0"/>
+            </a:endParaRPr>
+          </a:p>
+        </p:txBody>
+      </p:sp>
+      <p:sp>
+        <p:nvSpPr>
+          <p:cNvPr id="7" name="Rectangle 6">
+            <a:extLst>
+              <a:ext uri="{FF2B5EF4-FFF2-40B4-BE49-F238E27FC236}">
+                <a16:creationId xmlns:a16="http://schemas.microsoft.com/office/drawing/2014/main" id="{77F556E3-E4A0-2148-8113-600CB583AA59}"/>
+              </a:ext>
+            </a:extLst>
+          </p:cNvPr>
+          <p:cNvSpPr/>
+          <p:nvPr/>
+        </p:nvSpPr>
+        <p:spPr>
+          <a:xfrm>
+            <a:off x="9375490" y="2369240"/>
+            <a:ext cx="2550289" cy="646495"/>
+          </a:xfrm>
+          <a:prstGeom prst="rect">
+            <a:avLst/>
+          </a:prstGeom>
+          <a:solidFill>
+            <a:schemeClr val="accent6">
+              <a:lumMod val="20000"/>
+              <a:lumOff val="80000"/>
+            </a:schemeClr>
+          </a:solidFill>
+          <a:ln w="19050">
+            <a:solidFill>
+              <a:schemeClr val="tx1"/>
+            </a:solidFill>
+            <a:prstDash val="dash"/>
+          </a:ln>
+          <a:effectLst>
+            <a:outerShdw blurRad="50800" dist="38100" dir="2700000" algn="tl" rotWithShape="0">
+              <a:prstClr val="black">
+                <a:alpha val="40000"/>
+              </a:prstClr>
+            </a:outerShdw>
+          </a:effectLst>
+        </p:spPr>
+        <p:style>
+          <a:lnRef idx="2">
+            <a:schemeClr val="accent1">
+              <a:shade val="50000"/>
+            </a:schemeClr>
+          </a:lnRef>
+          <a:fillRef idx="1">
+            <a:schemeClr val="accent1"/>
+          </a:fillRef>
+          <a:effectRef idx="0">
+            <a:schemeClr val="accent1"/>
+          </a:effectRef>
+          <a:fontRef idx="minor">
+            <a:schemeClr val="lt1"/>
+          </a:fontRef>
+        </p:style>
+        <p:txBody>
+          <a:bodyPr rtlCol="0" anchor="ctr"/>
+          <a:lstStyle/>
+          <a:p>
+            <a:pPr algn="ctr"/>
+            <a:r>
+              <a:rPr lang="en-US" b="1" dirty="0">
+                <a:solidFill>
+                  <a:schemeClr val="tx1"/>
+                </a:solidFill>
+                <a:latin typeface="Times New Roman" panose="02020603050405020304" pitchFamily="18" charset="0"/>
+                <a:cs typeface="Times New Roman" panose="02020603050405020304" pitchFamily="18" charset="0"/>
+              </a:rPr>
+              <a:t>Secondary Market</a:t>
+            </a:r>
+            <a:endParaRPr lang="en-CN" b="1" dirty="0">
+              <a:solidFill>
+                <a:schemeClr val="tx1"/>
+              </a:solidFill>
+              <a:latin typeface="Times New Roman" panose="02020603050405020304" pitchFamily="18" charset="0"/>
+              <a:cs typeface="Times New Roman" panose="02020603050405020304" pitchFamily="18" charset="0"/>
+            </a:endParaRPr>
+          </a:p>
+        </p:txBody>
+      </p:sp>
+      <p:sp>
+        <p:nvSpPr>
+          <p:cNvPr id="8" name="Rectangle 7">
+            <a:extLst>
+              <a:ext uri="{FF2B5EF4-FFF2-40B4-BE49-F238E27FC236}">
+                <a16:creationId xmlns:a16="http://schemas.microsoft.com/office/drawing/2014/main" id="{4BD00138-F6BD-7748-8964-B4B38EEE0839}"/>
+              </a:ext>
+            </a:extLst>
+          </p:cNvPr>
+          <p:cNvSpPr/>
+          <p:nvPr/>
+        </p:nvSpPr>
+        <p:spPr>
+          <a:xfrm>
+            <a:off x="4820854" y="4247112"/>
+            <a:ext cx="2550289" cy="646495"/>
+          </a:xfrm>
+          <a:prstGeom prst="rect">
+            <a:avLst/>
+          </a:prstGeom>
+          <a:solidFill>
+            <a:schemeClr val="accent6">
+              <a:lumMod val="20000"/>
+              <a:lumOff val="80000"/>
+            </a:schemeClr>
+          </a:solidFill>
+          <a:ln w="19050">
+            <a:solidFill>
+              <a:schemeClr val="tx1"/>
+            </a:solidFill>
+            <a:prstDash val="dash"/>
+          </a:ln>
+          <a:effectLst>
+            <a:outerShdw blurRad="50800" dist="38100" dir="2700000" algn="tl" rotWithShape="0">
+              <a:prstClr val="black">
+                <a:alpha val="40000"/>
+              </a:prstClr>
+            </a:outerShdw>
+          </a:effectLst>
+        </p:spPr>
+        <p:style>
+          <a:lnRef idx="2">
+            <a:schemeClr val="accent1">
+              <a:shade val="50000"/>
+            </a:schemeClr>
+          </a:lnRef>
+          <a:fillRef idx="1">
+            <a:schemeClr val="accent1"/>
+          </a:fillRef>
+          <a:effectRef idx="0">
+            <a:schemeClr val="accent1"/>
+          </a:effectRef>
+          <a:fontRef idx="minor">
+            <a:schemeClr val="lt1"/>
+          </a:fontRef>
+        </p:style>
+        <p:txBody>
+          <a:bodyPr rtlCol="0" anchor="ctr"/>
+          <a:lstStyle/>
+          <a:p>
+            <a:pPr algn="ctr"/>
+            <a:r>
+              <a:rPr lang="en-CN" b="1" dirty="0">
+                <a:solidFill>
+                  <a:schemeClr val="tx1"/>
+                </a:solidFill>
+                <a:latin typeface="Times New Roman" panose="02020603050405020304" pitchFamily="18" charset="0"/>
+                <a:cs typeface="Times New Roman" panose="02020603050405020304" pitchFamily="18" charset="0"/>
+              </a:rPr>
+              <a:t>Stock Market</a:t>
+            </a:r>
+          </a:p>
+        </p:txBody>
+      </p:sp>
+      <p:grpSp>
+        <p:nvGrpSpPr>
+          <p:cNvPr id="12" name="Group 11">
+            <a:extLst>
+              <a:ext uri="{FF2B5EF4-FFF2-40B4-BE49-F238E27FC236}">
+                <a16:creationId xmlns:a16="http://schemas.microsoft.com/office/drawing/2014/main" id="{B9C4FD50-A12F-3D44-B63F-69BB9299723E}"/>
+              </a:ext>
+            </a:extLst>
+          </p:cNvPr>
+          <p:cNvGrpSpPr/>
+          <p:nvPr/>
+        </p:nvGrpSpPr>
+        <p:grpSpPr>
+          <a:xfrm>
+            <a:off x="2816506" y="2550113"/>
+            <a:ext cx="2004348" cy="284748"/>
+            <a:chOff x="2816506" y="3398002"/>
+            <a:chExt cx="2004348" cy="284748"/>
+          </a:xfrm>
+        </p:grpSpPr>
+        <p:cxnSp>
+          <p:nvCxnSpPr>
+            <p:cNvPr id="10" name="Straight Arrow Connector 9">
+              <a:extLst>
+                <a:ext uri="{FF2B5EF4-FFF2-40B4-BE49-F238E27FC236}">
+                  <a16:creationId xmlns:a16="http://schemas.microsoft.com/office/drawing/2014/main" id="{F22876C3-B594-F044-AD59-0013DCEE5E93}"/>
+                </a:ext>
+              </a:extLst>
+            </p:cNvPr>
+            <p:cNvCxnSpPr>
+              <a:cxnSpLocks/>
+            </p:cNvCxnSpPr>
+            <p:nvPr/>
+          </p:nvCxnSpPr>
+          <p:spPr>
+            <a:xfrm>
+              <a:off x="2816507" y="3398002"/>
+              <a:ext cx="2004347" cy="0"/>
+            </a:xfrm>
+            <a:prstGeom prst="straightConnector1">
+              <a:avLst/>
+            </a:prstGeom>
+            <a:ln w="15875">
+              <a:solidFill>
+                <a:schemeClr val="accent2"/>
+              </a:solidFill>
+              <a:tailEnd type="stealth" w="lg" len="lg"/>
+            </a:ln>
+          </p:spPr>
+          <p:style>
+            <a:lnRef idx="1">
+              <a:schemeClr val="accent1"/>
+            </a:lnRef>
+            <a:fillRef idx="0">
+              <a:schemeClr val="accent1"/>
+            </a:fillRef>
+            <a:effectRef idx="0">
+              <a:schemeClr val="accent1"/>
+            </a:effectRef>
+            <a:fontRef idx="minor">
+              <a:schemeClr val="tx1"/>
+            </a:fontRef>
+          </p:style>
+        </p:cxnSp>
+        <p:cxnSp>
+          <p:nvCxnSpPr>
+            <p:cNvPr id="11" name="Straight Arrow Connector 10">
+              <a:extLst>
+                <a:ext uri="{FF2B5EF4-FFF2-40B4-BE49-F238E27FC236}">
+                  <a16:creationId xmlns:a16="http://schemas.microsoft.com/office/drawing/2014/main" id="{CA252B74-7F7E-0D42-B6A0-2BB0273C3B5C}"/>
+                </a:ext>
+              </a:extLst>
+            </p:cNvPr>
+            <p:cNvCxnSpPr>
+              <a:cxnSpLocks/>
+            </p:cNvCxnSpPr>
+            <p:nvPr/>
+          </p:nvCxnSpPr>
+          <p:spPr>
+            <a:xfrm>
+              <a:off x="2816506" y="3682750"/>
+              <a:ext cx="2004347" cy="0"/>
+            </a:xfrm>
+            <a:prstGeom prst="straightConnector1">
+              <a:avLst/>
+            </a:prstGeom>
+            <a:ln w="15875">
+              <a:solidFill>
+                <a:schemeClr val="accent2"/>
+              </a:solidFill>
+              <a:headEnd type="stealth" w="lg" len="lg"/>
+              <a:tailEnd type="none" w="lg" len="lg"/>
+            </a:ln>
+          </p:spPr>
+          <p:style>
+            <a:lnRef idx="1">
+              <a:schemeClr val="accent1"/>
+            </a:lnRef>
+            <a:fillRef idx="0">
+              <a:schemeClr val="accent1"/>
+            </a:fillRef>
+            <a:effectRef idx="0">
+              <a:schemeClr val="accent1"/>
+            </a:effectRef>
+            <a:fontRef idx="minor">
+              <a:schemeClr val="tx1"/>
+            </a:fontRef>
+          </p:style>
+        </p:cxnSp>
+      </p:grpSp>
+      <p:sp>
+        <p:nvSpPr>
+          <p:cNvPr id="14" name="TextBox 13">
+            <a:extLst>
+              <a:ext uri="{FF2B5EF4-FFF2-40B4-BE49-F238E27FC236}">
+                <a16:creationId xmlns:a16="http://schemas.microsoft.com/office/drawing/2014/main" id="{505F4F6C-3628-3B46-B4EA-1B2C32EC03F8}"/>
+              </a:ext>
+            </a:extLst>
+          </p:cNvPr>
+          <p:cNvSpPr txBox="1"/>
+          <p:nvPr/>
+        </p:nvSpPr>
+        <p:spPr>
+          <a:xfrm>
+            <a:off x="2816504" y="1965526"/>
+            <a:ext cx="2004347" cy="584775"/>
+          </a:xfrm>
+          <a:prstGeom prst="rect">
+            <a:avLst/>
+          </a:prstGeom>
+          <a:noFill/>
+        </p:spPr>
+        <p:txBody>
+          <a:bodyPr wrap="square">
+            <a:spAutoFit/>
+          </a:bodyPr>
+          <a:lstStyle/>
+          <a:p>
+            <a:pPr algn="ctr"/>
+            <a:r>
+              <a:rPr lang="en-US" sz="1600" i="1" dirty="0">
+                <a:solidFill>
+                  <a:schemeClr val="accent2"/>
+                </a:solidFill>
+                <a:effectLst/>
+                <a:latin typeface="Times New Roman" panose="02020603050405020304" pitchFamily="18" charset="0"/>
+                <a:ea typeface="KaiTi" panose="02010609060101010101" pitchFamily="49" charset="-122"/>
+              </a:rPr>
+              <a:t>Treasury bonds and central bank bills</a:t>
+            </a:r>
+            <a:r>
+              <a:rPr lang="en-CN" sz="1600" i="1" dirty="0">
+                <a:solidFill>
+                  <a:schemeClr val="accent2"/>
+                </a:solidFill>
+                <a:effectLst/>
+              </a:rPr>
+              <a:t> </a:t>
+            </a:r>
+            <a:endParaRPr lang="en-CN" sz="1600" i="1" dirty="0">
+              <a:solidFill>
+                <a:schemeClr val="accent2"/>
+              </a:solidFill>
+            </a:endParaRPr>
+          </a:p>
+        </p:txBody>
+      </p:sp>
+      <p:sp>
+        <p:nvSpPr>
+          <p:cNvPr id="16" name="TextBox 15">
+            <a:extLst>
+              <a:ext uri="{FF2B5EF4-FFF2-40B4-BE49-F238E27FC236}">
+                <a16:creationId xmlns:a16="http://schemas.microsoft.com/office/drawing/2014/main" id="{2020FC83-2743-FD42-83EE-82A133B1C2BB}"/>
+              </a:ext>
+            </a:extLst>
+          </p:cNvPr>
+          <p:cNvSpPr txBox="1"/>
+          <p:nvPr/>
+        </p:nvSpPr>
+        <p:spPr>
+          <a:xfrm>
+            <a:off x="2815702" y="2844575"/>
+            <a:ext cx="2004347" cy="584775"/>
+          </a:xfrm>
+          <a:prstGeom prst="rect">
+            <a:avLst/>
+          </a:prstGeom>
+          <a:noFill/>
+        </p:spPr>
+        <p:txBody>
+          <a:bodyPr wrap="square">
+            <a:spAutoFit/>
+          </a:bodyPr>
+          <a:lstStyle/>
+          <a:p>
+            <a:pPr algn="ctr"/>
+            <a:r>
+              <a:rPr lang="en-US" sz="1600" i="1" dirty="0">
+                <a:solidFill>
+                  <a:schemeClr val="accent2"/>
+                </a:solidFill>
+                <a:latin typeface="Times New Roman" panose="02020603050405020304" pitchFamily="18" charset="0"/>
+                <a:ea typeface="KaiTi" panose="02010609060101010101" pitchFamily="49" charset="-122"/>
+              </a:rPr>
+              <a:t>B</a:t>
+            </a:r>
+            <a:r>
+              <a:rPr lang="en-US" sz="1600" i="1" dirty="0">
+                <a:solidFill>
+                  <a:schemeClr val="accent2"/>
+                </a:solidFill>
+                <a:effectLst/>
+                <a:latin typeface="Times New Roman" panose="02020603050405020304" pitchFamily="18" charset="0"/>
+                <a:ea typeface="KaiTi" panose="02010609060101010101" pitchFamily="49" charset="-122"/>
+              </a:rPr>
+              <a:t>onds, Stock ETFs and CSI 300 stocks</a:t>
+            </a:r>
+            <a:r>
+              <a:rPr lang="en-CN" sz="1600" i="1" dirty="0">
+                <a:solidFill>
+                  <a:schemeClr val="accent2"/>
+                </a:solidFill>
+                <a:effectLst/>
+              </a:rPr>
+              <a:t> </a:t>
+            </a:r>
+            <a:endParaRPr lang="en-CN" sz="1600" i="1" dirty="0">
+              <a:solidFill>
+                <a:schemeClr val="accent2"/>
+              </a:solidFill>
+            </a:endParaRPr>
+          </a:p>
+        </p:txBody>
+      </p:sp>
+      <p:grpSp>
+        <p:nvGrpSpPr>
+          <p:cNvPr id="17" name="Group 16">
+            <a:extLst>
+              <a:ext uri="{FF2B5EF4-FFF2-40B4-BE49-F238E27FC236}">
+                <a16:creationId xmlns:a16="http://schemas.microsoft.com/office/drawing/2014/main" id="{8F2DFFBF-98E0-E34F-97BA-C88E4A45095E}"/>
+              </a:ext>
+            </a:extLst>
+          </p:cNvPr>
+          <p:cNvGrpSpPr/>
+          <p:nvPr/>
+        </p:nvGrpSpPr>
+        <p:grpSpPr>
+          <a:xfrm>
+            <a:off x="7371142" y="2550113"/>
+            <a:ext cx="2004348" cy="284748"/>
+            <a:chOff x="2816506" y="3398002"/>
+            <a:chExt cx="2004348" cy="284748"/>
+          </a:xfrm>
+        </p:grpSpPr>
+        <p:cxnSp>
+          <p:nvCxnSpPr>
+            <p:cNvPr id="18" name="Straight Arrow Connector 17">
+              <a:extLst>
+                <a:ext uri="{FF2B5EF4-FFF2-40B4-BE49-F238E27FC236}">
+                  <a16:creationId xmlns:a16="http://schemas.microsoft.com/office/drawing/2014/main" id="{A5B1195C-C868-0645-BC0A-F76A1F60DB30}"/>
+                </a:ext>
+              </a:extLst>
+            </p:cNvPr>
+            <p:cNvCxnSpPr>
+              <a:cxnSpLocks/>
+            </p:cNvCxnSpPr>
+            <p:nvPr/>
+          </p:nvCxnSpPr>
+          <p:spPr>
+            <a:xfrm>
+              <a:off x="2816507" y="3398002"/>
+              <a:ext cx="2004347" cy="0"/>
+            </a:xfrm>
+            <a:prstGeom prst="straightConnector1">
+              <a:avLst/>
+            </a:prstGeom>
+            <a:ln w="15875">
+              <a:solidFill>
+                <a:schemeClr val="accent5"/>
+              </a:solidFill>
+              <a:tailEnd type="stealth" w="lg" len="lg"/>
+            </a:ln>
+          </p:spPr>
+          <p:style>
+            <a:lnRef idx="1">
+              <a:schemeClr val="accent1"/>
+            </a:lnRef>
+            <a:fillRef idx="0">
+              <a:schemeClr val="accent1"/>
+            </a:fillRef>
+            <a:effectRef idx="0">
+              <a:schemeClr val="accent1"/>
+            </a:effectRef>
+            <a:fontRef idx="minor">
+              <a:schemeClr val="tx1"/>
+            </a:fontRef>
+          </p:style>
+        </p:cxnSp>
+        <p:cxnSp>
+          <p:nvCxnSpPr>
+            <p:cNvPr id="19" name="Straight Arrow Connector 18">
+              <a:extLst>
+                <a:ext uri="{FF2B5EF4-FFF2-40B4-BE49-F238E27FC236}">
+                  <a16:creationId xmlns:a16="http://schemas.microsoft.com/office/drawing/2014/main" id="{F167FCED-13BB-324E-AFA2-759B4E3EE4A9}"/>
+                </a:ext>
+              </a:extLst>
+            </p:cNvPr>
+            <p:cNvCxnSpPr>
+              <a:cxnSpLocks/>
+            </p:cNvCxnSpPr>
+            <p:nvPr/>
+          </p:nvCxnSpPr>
+          <p:spPr>
+            <a:xfrm>
+              <a:off x="2816506" y="3682750"/>
+              <a:ext cx="2004347" cy="0"/>
+            </a:xfrm>
+            <a:prstGeom prst="straightConnector1">
+              <a:avLst/>
+            </a:prstGeom>
+            <a:ln w="15875">
+              <a:solidFill>
+                <a:schemeClr val="accent5"/>
+              </a:solidFill>
+              <a:headEnd type="stealth" w="lg" len="lg"/>
+              <a:tailEnd type="none" w="lg" len="lg"/>
+            </a:ln>
+          </p:spPr>
+          <p:style>
+            <a:lnRef idx="1">
+              <a:schemeClr val="accent1"/>
+            </a:lnRef>
+            <a:fillRef idx="0">
+              <a:schemeClr val="accent1"/>
+            </a:fillRef>
+            <a:effectRef idx="0">
+              <a:schemeClr val="accent1"/>
+            </a:effectRef>
+            <a:fontRef idx="minor">
+              <a:schemeClr val="tx1"/>
+            </a:fontRef>
+          </p:style>
+        </p:cxnSp>
+      </p:grpSp>
+      <p:sp>
+        <p:nvSpPr>
+          <p:cNvPr id="20" name="TextBox 19">
+            <a:extLst>
+              <a:ext uri="{FF2B5EF4-FFF2-40B4-BE49-F238E27FC236}">
+                <a16:creationId xmlns:a16="http://schemas.microsoft.com/office/drawing/2014/main" id="{3A074757-8146-2B41-8844-5F423D409105}"/>
+              </a:ext>
+            </a:extLst>
+          </p:cNvPr>
+          <p:cNvSpPr txBox="1"/>
+          <p:nvPr/>
+        </p:nvSpPr>
+        <p:spPr>
+          <a:xfrm>
+            <a:off x="7371137" y="1959626"/>
+            <a:ext cx="2004347" cy="584775"/>
+          </a:xfrm>
+          <a:prstGeom prst="rect">
+            <a:avLst/>
+          </a:prstGeom>
+          <a:noFill/>
+        </p:spPr>
+        <p:txBody>
+          <a:bodyPr wrap="square">
+            <a:spAutoFit/>
+          </a:bodyPr>
+          <a:lstStyle/>
+          <a:p>
+            <a:pPr algn="ctr"/>
+            <a:r>
+              <a:rPr lang="en-US" sz="1600" i="1" dirty="0">
+                <a:solidFill>
+                  <a:schemeClr val="accent5"/>
+                </a:solidFill>
+                <a:effectLst/>
+                <a:latin typeface="Times New Roman" panose="02020603050405020304" pitchFamily="18" charset="0"/>
+                <a:ea typeface="KaiTi" panose="02010609060101010101" pitchFamily="49" charset="-122"/>
+              </a:rPr>
+              <a:t>Treasury bonds and central bank bills</a:t>
+            </a:r>
+            <a:r>
+              <a:rPr lang="en-CN" sz="1600" i="1" dirty="0">
+                <a:solidFill>
+                  <a:schemeClr val="accent5"/>
+                </a:solidFill>
+                <a:effectLst/>
+              </a:rPr>
+              <a:t> </a:t>
+            </a:r>
+            <a:endParaRPr lang="en-CN" sz="1600" i="1" dirty="0">
+              <a:solidFill>
+                <a:schemeClr val="accent5"/>
+              </a:solidFill>
+            </a:endParaRPr>
+          </a:p>
+        </p:txBody>
+      </p:sp>
+      <p:sp>
+        <p:nvSpPr>
+          <p:cNvPr id="21" name="TextBox 20">
+            <a:extLst>
+              <a:ext uri="{FF2B5EF4-FFF2-40B4-BE49-F238E27FC236}">
+                <a16:creationId xmlns:a16="http://schemas.microsoft.com/office/drawing/2014/main" id="{662CC380-DC31-CA4D-BD40-C5B155503B3F}"/>
+              </a:ext>
+            </a:extLst>
+          </p:cNvPr>
+          <p:cNvSpPr txBox="1"/>
+          <p:nvPr/>
+        </p:nvSpPr>
+        <p:spPr>
+          <a:xfrm>
+            <a:off x="7371137" y="2842763"/>
+            <a:ext cx="2004347" cy="338554"/>
+          </a:xfrm>
+          <a:prstGeom prst="rect">
+            <a:avLst/>
+          </a:prstGeom>
+          <a:noFill/>
+        </p:spPr>
+        <p:txBody>
+          <a:bodyPr wrap="square">
+            <a:spAutoFit/>
+          </a:bodyPr>
+          <a:lstStyle/>
+          <a:p>
+            <a:pPr algn="ctr"/>
+            <a:r>
+              <a:rPr lang="en-US" sz="1600" i="1" dirty="0">
+                <a:solidFill>
+                  <a:schemeClr val="accent5"/>
+                </a:solidFill>
+                <a:latin typeface="Times New Roman" panose="02020603050405020304" pitchFamily="18" charset="0"/>
+                <a:ea typeface="KaiTi" panose="02010609060101010101" pitchFamily="49" charset="-122"/>
+              </a:rPr>
+              <a:t>Special Funding</a:t>
+            </a:r>
+            <a:r>
+              <a:rPr lang="zh-CN" altLang="en-US" sz="1600" i="1" dirty="0">
+                <a:solidFill>
+                  <a:schemeClr val="accent5"/>
+                </a:solidFill>
+                <a:latin typeface="Times New Roman" panose="02020603050405020304" pitchFamily="18" charset="0"/>
+                <a:ea typeface="KaiTi" panose="02010609060101010101" pitchFamily="49" charset="-122"/>
+              </a:rPr>
+              <a:t> </a:t>
+            </a:r>
+            <a:r>
+              <a:rPr lang="en-US" altLang="zh-CN" sz="1600" b="1" dirty="0">
+                <a:solidFill>
+                  <a:schemeClr val="tx1"/>
+                </a:solidFill>
+                <a:latin typeface="Times New Roman" panose="02020603050405020304" pitchFamily="18" charset="0"/>
+                <a:ea typeface="KaiTi" panose="02010609060101010101" pitchFamily="49" charset="-122"/>
+                <a:cs typeface="Times New Roman" panose="02020603050405020304" pitchFamily="18" charset="0"/>
+              </a:rPr>
+              <a:t>💰</a:t>
+            </a:r>
+            <a:endParaRPr lang="en-CN" sz="1600" i="1" dirty="0">
+              <a:solidFill>
+                <a:schemeClr val="accent5"/>
+              </a:solidFill>
+            </a:endParaRPr>
+          </a:p>
+        </p:txBody>
+      </p:sp>
+      <p:grpSp>
+        <p:nvGrpSpPr>
+          <p:cNvPr id="50" name="Group 49">
+            <a:extLst>
+              <a:ext uri="{FF2B5EF4-FFF2-40B4-BE49-F238E27FC236}">
+                <a16:creationId xmlns:a16="http://schemas.microsoft.com/office/drawing/2014/main" id="{65E970A6-F12E-B642-B892-41D40B8CF863}"/>
+              </a:ext>
+            </a:extLst>
+          </p:cNvPr>
+          <p:cNvGrpSpPr/>
+          <p:nvPr/>
+        </p:nvGrpSpPr>
+        <p:grpSpPr>
+          <a:xfrm>
+            <a:off x="5853234" y="3015735"/>
+            <a:ext cx="485527" cy="1253115"/>
+            <a:chOff x="5913392" y="3097931"/>
+            <a:chExt cx="485527" cy="1253115"/>
+          </a:xfrm>
+        </p:grpSpPr>
+        <p:cxnSp>
+          <p:nvCxnSpPr>
+            <p:cNvPr id="23" name="Straight Arrow Connector 22">
+              <a:extLst>
+                <a:ext uri="{FF2B5EF4-FFF2-40B4-BE49-F238E27FC236}">
+                  <a16:creationId xmlns:a16="http://schemas.microsoft.com/office/drawing/2014/main" id="{A2FDAF3B-76F2-A641-9E8C-04DB873C34F1}"/>
+                </a:ext>
+              </a:extLst>
+            </p:cNvPr>
+            <p:cNvCxnSpPr>
+              <a:cxnSpLocks/>
+            </p:cNvCxnSpPr>
+            <p:nvPr/>
+          </p:nvCxnSpPr>
+          <p:spPr>
+            <a:xfrm rot="16200000">
+              <a:off x="5306294" y="3705029"/>
+              <a:ext cx="1214196" cy="0"/>
+            </a:xfrm>
+            <a:prstGeom prst="straightConnector1">
+              <a:avLst/>
+            </a:prstGeom>
+            <a:ln w="15875">
+              <a:solidFill>
+                <a:srgbClr val="C00000"/>
+              </a:solidFill>
+              <a:tailEnd type="stealth" w="lg" len="lg"/>
+            </a:ln>
+          </p:spPr>
+          <p:style>
+            <a:lnRef idx="1">
+              <a:schemeClr val="accent1"/>
+            </a:lnRef>
+            <a:fillRef idx="0">
+              <a:schemeClr val="accent1"/>
+            </a:fillRef>
+            <a:effectRef idx="0">
+              <a:schemeClr val="accent1"/>
+            </a:effectRef>
+            <a:fontRef idx="minor">
+              <a:schemeClr val="tx1"/>
+            </a:fontRef>
+          </p:style>
+        </p:cxnSp>
+        <p:cxnSp>
+          <p:nvCxnSpPr>
+            <p:cNvPr id="24" name="Straight Arrow Connector 23">
+              <a:extLst>
+                <a:ext uri="{FF2B5EF4-FFF2-40B4-BE49-F238E27FC236}">
+                  <a16:creationId xmlns:a16="http://schemas.microsoft.com/office/drawing/2014/main" id="{204F5A91-EFFE-7D4D-AB42-807A21ED18A0}"/>
+                </a:ext>
+              </a:extLst>
+            </p:cNvPr>
+            <p:cNvCxnSpPr>
+              <a:cxnSpLocks/>
+            </p:cNvCxnSpPr>
+            <p:nvPr/>
+          </p:nvCxnSpPr>
+          <p:spPr>
+            <a:xfrm rot="16200000">
+              <a:off x="5791821" y="3743948"/>
+              <a:ext cx="1214196" cy="0"/>
+            </a:xfrm>
+            <a:prstGeom prst="straightConnector1">
+              <a:avLst/>
+            </a:prstGeom>
+            <a:ln w="15875">
+              <a:solidFill>
+                <a:srgbClr val="C00000"/>
+              </a:solidFill>
+              <a:headEnd type="stealth" w="lg" len="lg"/>
+              <a:tailEnd type="none" w="lg" len="lg"/>
+            </a:ln>
+          </p:spPr>
+          <p:style>
+            <a:lnRef idx="1">
+              <a:schemeClr val="accent1"/>
+            </a:lnRef>
+            <a:fillRef idx="0">
+              <a:schemeClr val="accent1"/>
+            </a:fillRef>
+            <a:effectRef idx="0">
+              <a:schemeClr val="accent1"/>
+            </a:effectRef>
+            <a:fontRef idx="minor">
+              <a:schemeClr val="tx1"/>
+            </a:fontRef>
+          </p:style>
+        </p:cxnSp>
+      </p:grpSp>
+      <p:sp>
+        <p:nvSpPr>
+          <p:cNvPr id="25" name="TextBox 24">
+            <a:extLst>
+              <a:ext uri="{FF2B5EF4-FFF2-40B4-BE49-F238E27FC236}">
+                <a16:creationId xmlns:a16="http://schemas.microsoft.com/office/drawing/2014/main" id="{7CC35E44-C486-CC4E-98D4-562F61EC7F83}"/>
+              </a:ext>
+            </a:extLst>
+          </p:cNvPr>
+          <p:cNvSpPr txBox="1"/>
+          <p:nvPr/>
+        </p:nvSpPr>
+        <p:spPr>
+          <a:xfrm>
+            <a:off x="6337962" y="3361359"/>
+            <a:ext cx="1207929" cy="584775"/>
+          </a:xfrm>
+          <a:prstGeom prst="rect">
+            <a:avLst/>
+          </a:prstGeom>
+          <a:noFill/>
+        </p:spPr>
+        <p:txBody>
+          <a:bodyPr wrap="square">
+            <a:spAutoFit/>
+          </a:bodyPr>
+          <a:lstStyle/>
+          <a:p>
+            <a:pPr algn="ctr"/>
+            <a:r>
+              <a:rPr lang="en-US" sz="1600" i="1" dirty="0">
+                <a:solidFill>
+                  <a:srgbClr val="C00000"/>
+                </a:solidFill>
+                <a:effectLst/>
+                <a:latin typeface="Times New Roman" panose="02020603050405020304" pitchFamily="18" charset="0"/>
+                <a:ea typeface="KaiTi" panose="02010609060101010101" pitchFamily="49" charset="-122"/>
+              </a:rPr>
+              <a:t>Special Funding </a:t>
+            </a:r>
+            <a:r>
+              <a:rPr lang="en-US" altLang="zh-CN" sz="1600" b="1" dirty="0">
+                <a:solidFill>
+                  <a:schemeClr val="tx1"/>
+                </a:solidFill>
+                <a:latin typeface="Times New Roman" panose="02020603050405020304" pitchFamily="18" charset="0"/>
+                <a:ea typeface="KaiTi" panose="02010609060101010101" pitchFamily="49" charset="-122"/>
+                <a:cs typeface="Times New Roman" panose="02020603050405020304" pitchFamily="18" charset="0"/>
+              </a:rPr>
+              <a:t>💰</a:t>
+            </a:r>
+            <a:endParaRPr lang="en-US" sz="1600" i="1" dirty="0">
+              <a:solidFill>
+                <a:srgbClr val="C00000"/>
+              </a:solidFill>
+              <a:effectLst/>
+              <a:latin typeface="Times New Roman" panose="02020603050405020304" pitchFamily="18" charset="0"/>
+              <a:ea typeface="KaiTi" panose="02010609060101010101" pitchFamily="49" charset="-122"/>
+            </a:endParaRPr>
+          </a:p>
+        </p:txBody>
+      </p:sp>
+      <p:sp>
+        <p:nvSpPr>
+          <p:cNvPr id="26" name="TextBox 25">
+            <a:extLst>
+              <a:ext uri="{FF2B5EF4-FFF2-40B4-BE49-F238E27FC236}">
+                <a16:creationId xmlns:a16="http://schemas.microsoft.com/office/drawing/2014/main" id="{35838F08-94A2-9543-AAE0-9DFE496251F0}"/>
+              </a:ext>
+            </a:extLst>
+          </p:cNvPr>
+          <p:cNvSpPr txBox="1"/>
+          <p:nvPr/>
+        </p:nvSpPr>
+        <p:spPr>
+          <a:xfrm>
+            <a:off x="4879230" y="3484943"/>
+            <a:ext cx="972222" cy="338554"/>
+          </a:xfrm>
+          <a:prstGeom prst="rect">
+            <a:avLst/>
+          </a:prstGeom>
+          <a:noFill/>
+        </p:spPr>
+        <p:txBody>
+          <a:bodyPr wrap="square">
+            <a:spAutoFit/>
+          </a:bodyPr>
+          <a:lstStyle/>
+          <a:p>
+            <a:pPr algn="ctr"/>
+            <a:r>
+              <a:rPr lang="en-US" sz="1600" i="1" dirty="0">
+                <a:solidFill>
+                  <a:srgbClr val="C00000"/>
+                </a:solidFill>
+                <a:latin typeface="Times New Roman" panose="02020603050405020304" pitchFamily="18" charset="0"/>
+                <a:ea typeface="KaiTi" panose="02010609060101010101" pitchFamily="49" charset="-122"/>
+              </a:rPr>
+              <a:t>Stock</a:t>
+            </a:r>
+            <a:r>
+              <a:rPr lang="zh-CN" altLang="en-US" sz="1600" i="1" dirty="0">
+                <a:solidFill>
+                  <a:srgbClr val="C00000"/>
+                </a:solidFill>
+                <a:latin typeface="Times New Roman" panose="02020603050405020304" pitchFamily="18" charset="0"/>
+                <a:ea typeface="KaiTi" panose="02010609060101010101" pitchFamily="49" charset="-122"/>
+              </a:rPr>
+              <a:t> </a:t>
+            </a:r>
+            <a:r>
+              <a:rPr lang="en-US" altLang="zh-CN" sz="1600" b="1" dirty="0">
+                <a:solidFill>
+                  <a:schemeClr val="tx1"/>
+                </a:solidFill>
+                <a:latin typeface="Times New Roman" panose="02020603050405020304" pitchFamily="18" charset="0"/>
+                <a:ea typeface="KaiTi" panose="02010609060101010101" pitchFamily="49" charset="-122"/>
+                <a:cs typeface="Times New Roman" panose="02020603050405020304" pitchFamily="18" charset="0"/>
+              </a:rPr>
+              <a:t>💵</a:t>
+            </a:r>
+            <a:endParaRPr lang="en-CN" sz="1600" i="1" dirty="0">
+              <a:solidFill>
+                <a:srgbClr val="C00000"/>
+              </a:solidFill>
+            </a:endParaRPr>
+          </a:p>
+        </p:txBody>
+      </p:sp>
+      <p:sp>
+        <p:nvSpPr>
+          <p:cNvPr id="49" name="Rounded Rectangle 48">
+            <a:extLst>
+              <a:ext uri="{FF2B5EF4-FFF2-40B4-BE49-F238E27FC236}">
+                <a16:creationId xmlns:a16="http://schemas.microsoft.com/office/drawing/2014/main" id="{06043D37-2C65-7A48-AB42-F2DAD582BB2E}"/>
+              </a:ext>
+            </a:extLst>
+          </p:cNvPr>
+          <p:cNvSpPr/>
+          <p:nvPr/>
+        </p:nvSpPr>
+        <p:spPr>
+          <a:xfrm>
+            <a:off x="166632" y="1777666"/>
+            <a:ext cx="11858735" cy="3302668"/>
+          </a:xfrm>
+          <a:prstGeom prst="roundRect">
+            <a:avLst>
+              <a:gd name="adj" fmla="val 2453"/>
+            </a:avLst>
+          </a:prstGeom>
+          <a:noFill/>
+          <a:ln w="19050">
+            <a:solidFill>
+              <a:schemeClr val="accent6">
+                <a:lumMod val="50000"/>
+              </a:schemeClr>
+            </a:solidFill>
+            <a:prstDash val="solid"/>
+          </a:ln>
+          <a:effectLst>
+            <a:outerShdw blurRad="50800" dist="38100" dir="2700000" algn="tl" rotWithShape="0">
+              <a:prstClr val="black">
+                <a:alpha val="40000"/>
+              </a:prstClr>
+            </a:outerShdw>
+          </a:effectLst>
+        </p:spPr>
+        <p:style>
+          <a:lnRef idx="2">
+            <a:schemeClr val="accent1">
+              <a:shade val="50000"/>
+            </a:schemeClr>
+          </a:lnRef>
+          <a:fillRef idx="1">
+            <a:schemeClr val="accent1"/>
+          </a:fillRef>
+          <a:effectRef idx="0">
+            <a:schemeClr val="accent1"/>
+          </a:effectRef>
+          <a:fontRef idx="minor">
+            <a:schemeClr val="lt1"/>
+          </a:fontRef>
+        </p:style>
+        <p:txBody>
+          <a:bodyPr rtlCol="0" anchor="t"/>
+          <a:lstStyle/>
+          <a:p>
+            <a:endParaRPr lang="en-CN" b="1" i="1" dirty="0">
+              <a:solidFill>
+                <a:srgbClr val="C00000"/>
+              </a:solidFill>
+              <a:latin typeface="Times New Roman" panose="02020603050405020304" pitchFamily="18" charset="0"/>
+              <a:ea typeface="KaiTi" panose="02010609060101010101" pitchFamily="49" charset="-122"/>
+              <a:cs typeface="Times New Roman" panose="02020603050405020304" pitchFamily="18" charset="0"/>
+            </a:endParaRPr>
+          </a:p>
+        </p:txBody>
+      </p:sp>
+      <p:sp>
+        <p:nvSpPr>
+          <p:cNvPr id="186" name="TextBox 185">
+            <a:extLst>
+              <a:ext uri="{FF2B5EF4-FFF2-40B4-BE49-F238E27FC236}">
+                <a16:creationId xmlns:a16="http://schemas.microsoft.com/office/drawing/2014/main" id="{93EDFCC8-D56B-3246-86F7-1E304047DA07}"/>
+              </a:ext>
+            </a:extLst>
+          </p:cNvPr>
+          <p:cNvSpPr txBox="1"/>
+          <p:nvPr/>
+        </p:nvSpPr>
+        <p:spPr>
+          <a:xfrm>
+            <a:off x="8600398" y="4014428"/>
+            <a:ext cx="3425371" cy="1065869"/>
+          </a:xfrm>
+          <a:prstGeom prst="rect">
+            <a:avLst/>
+          </a:prstGeom>
+          <a:noFill/>
+        </p:spPr>
+        <p:txBody>
+          <a:bodyPr wrap="square">
+            <a:spAutoFit/>
+          </a:bodyPr>
+          <a:lstStyle/>
+          <a:p>
+            <a:pPr>
+              <a:lnSpc>
+                <a:spcPct val="120000"/>
+              </a:lnSpc>
+            </a:pPr>
+            <a:r>
+              <a:rPr lang="en-CN" sz="1800" b="1" i="1" dirty="0">
+                <a:solidFill>
+                  <a:schemeClr val="accent2"/>
+                </a:solidFill>
+                <a:effectLst/>
+                <a:latin typeface="Times New Roman" panose="02020603050405020304" pitchFamily="18" charset="0"/>
+                <a:ea typeface="KaiTi" panose="02010609060101010101" pitchFamily="49" charset="-122"/>
+              </a:rPr>
+              <a:t>Part 1. </a:t>
+            </a:r>
+            <a:r>
+              <a:rPr lang="en-CN" b="1" i="1" dirty="0">
+                <a:solidFill>
+                  <a:schemeClr val="accent2"/>
+                </a:solidFill>
+                <a:latin typeface="Times New Roman" panose="02020603050405020304" pitchFamily="18" charset="0"/>
+                <a:ea typeface="KaiTi" panose="02010609060101010101" pitchFamily="49" charset="-122"/>
+              </a:rPr>
+              <a:t>S</a:t>
+            </a:r>
+            <a:r>
+              <a:rPr lang="en-CN" sz="1800" b="1" i="1" dirty="0">
+                <a:solidFill>
+                  <a:schemeClr val="accent2"/>
+                </a:solidFill>
+                <a:effectLst/>
+                <a:latin typeface="Times New Roman" panose="02020603050405020304" pitchFamily="18" charset="0"/>
+                <a:ea typeface="KaiTi" panose="02010609060101010101" pitchFamily="49" charset="-122"/>
+              </a:rPr>
+              <a:t>wap </a:t>
+            </a:r>
+            <a:r>
+              <a:rPr lang="en-CN" b="1" i="1" dirty="0">
+                <a:solidFill>
+                  <a:schemeClr val="accent2"/>
+                </a:solidFill>
+                <a:latin typeface="Times New Roman" panose="02020603050405020304" pitchFamily="18" charset="0"/>
+                <a:ea typeface="KaiTi" panose="02010609060101010101" pitchFamily="49" charset="-122"/>
+              </a:rPr>
+              <a:t>O</a:t>
+            </a:r>
+            <a:r>
+              <a:rPr lang="en-CN" sz="1800" b="1" i="1" dirty="0">
+                <a:solidFill>
+                  <a:schemeClr val="accent2"/>
+                </a:solidFill>
+                <a:effectLst/>
+                <a:latin typeface="Times New Roman" panose="02020603050405020304" pitchFamily="18" charset="0"/>
+                <a:ea typeface="KaiTi" panose="02010609060101010101" pitchFamily="49" charset="-122"/>
+              </a:rPr>
+              <a:t>peration</a:t>
+            </a:r>
+          </a:p>
+          <a:p>
+            <a:pPr>
+              <a:lnSpc>
+                <a:spcPct val="120000"/>
+              </a:lnSpc>
+            </a:pPr>
+            <a:r>
+              <a:rPr lang="en-CN" b="1" i="1" dirty="0">
+                <a:solidFill>
+                  <a:schemeClr val="accent5"/>
+                </a:solidFill>
+                <a:latin typeface="Times New Roman" panose="02020603050405020304" pitchFamily="18" charset="0"/>
+                <a:ea typeface="KaiTi" panose="02010609060101010101" pitchFamily="49" charset="-122"/>
+              </a:rPr>
+              <a:t>Part 2. I</a:t>
+            </a:r>
+            <a:r>
+              <a:rPr lang="en-CN" sz="1800" b="1" i="1" dirty="0">
+                <a:solidFill>
+                  <a:schemeClr val="accent5"/>
+                </a:solidFill>
+                <a:effectLst/>
+                <a:latin typeface="Times New Roman" panose="02020603050405020304" pitchFamily="18" charset="0"/>
+                <a:ea typeface="KaiTi" panose="02010609060101010101" pitchFamily="49" charset="-122"/>
+              </a:rPr>
+              <a:t>nstitutional </a:t>
+            </a:r>
+            <a:r>
+              <a:rPr lang="en-CN" b="1" i="1" dirty="0">
+                <a:solidFill>
+                  <a:schemeClr val="accent5"/>
+                </a:solidFill>
+                <a:latin typeface="Times New Roman" panose="02020603050405020304" pitchFamily="18" charset="0"/>
+                <a:ea typeface="KaiTi" panose="02010609060101010101" pitchFamily="49" charset="-122"/>
+              </a:rPr>
+              <a:t>F</a:t>
+            </a:r>
+            <a:r>
+              <a:rPr lang="en-CN" sz="1800" b="1" i="1" dirty="0">
+                <a:solidFill>
+                  <a:schemeClr val="accent5"/>
+                </a:solidFill>
+                <a:effectLst/>
+                <a:latin typeface="Times New Roman" panose="02020603050405020304" pitchFamily="18" charset="0"/>
+                <a:ea typeface="KaiTi" panose="02010609060101010101" pitchFamily="49" charset="-122"/>
+              </a:rPr>
+              <a:t>inancing</a:t>
+            </a:r>
+            <a:endParaRPr lang="en-CN" b="1" i="1" dirty="0">
+              <a:solidFill>
+                <a:schemeClr val="accent5"/>
+              </a:solidFill>
+              <a:latin typeface="Times New Roman" panose="02020603050405020304" pitchFamily="18" charset="0"/>
+              <a:ea typeface="KaiTi" panose="02010609060101010101" pitchFamily="49" charset="-122"/>
+            </a:endParaRPr>
+          </a:p>
+          <a:p>
+            <a:pPr>
+              <a:lnSpc>
+                <a:spcPct val="120000"/>
+              </a:lnSpc>
+            </a:pPr>
+            <a:r>
+              <a:rPr lang="en-CN" sz="1800" b="1" i="1" dirty="0">
+                <a:solidFill>
+                  <a:srgbClr val="C00000"/>
+                </a:solidFill>
+                <a:effectLst/>
+                <a:latin typeface="Times New Roman" panose="02020603050405020304" pitchFamily="18" charset="0"/>
+                <a:ea typeface="KaiTi" panose="02010609060101010101" pitchFamily="49" charset="-122"/>
+              </a:rPr>
+              <a:t>Part 3. </a:t>
+            </a:r>
+            <a:r>
+              <a:rPr lang="en-CN" b="1" i="1" dirty="0">
+                <a:solidFill>
+                  <a:srgbClr val="C00000"/>
+                </a:solidFill>
+                <a:latin typeface="Times New Roman" panose="02020603050405020304" pitchFamily="18" charset="0"/>
+                <a:ea typeface="KaiTi" panose="02010609060101010101" pitchFamily="49" charset="-122"/>
+              </a:rPr>
+              <a:t>I</a:t>
+            </a:r>
+            <a:r>
+              <a:rPr lang="en-CN" sz="1800" b="1" i="1" dirty="0">
+                <a:solidFill>
+                  <a:srgbClr val="C00000"/>
+                </a:solidFill>
+                <a:effectLst/>
+                <a:latin typeface="Times New Roman" panose="02020603050405020304" pitchFamily="18" charset="0"/>
+                <a:ea typeface="KaiTi" panose="02010609060101010101" pitchFamily="49" charset="-122"/>
+              </a:rPr>
+              <a:t>nstitutional </a:t>
+            </a:r>
+            <a:r>
+              <a:rPr lang="en-CN" b="1" i="1" dirty="0">
+                <a:solidFill>
+                  <a:srgbClr val="C00000"/>
+                </a:solidFill>
+                <a:latin typeface="Times New Roman" panose="02020603050405020304" pitchFamily="18" charset="0"/>
+                <a:ea typeface="KaiTi" panose="02010609060101010101" pitchFamily="49" charset="-122"/>
+              </a:rPr>
+              <a:t>I</a:t>
+            </a:r>
+            <a:r>
+              <a:rPr lang="en-CN" sz="1800" b="1" i="1" dirty="0">
+                <a:solidFill>
+                  <a:srgbClr val="C00000"/>
+                </a:solidFill>
+                <a:effectLst/>
+                <a:latin typeface="Times New Roman" panose="02020603050405020304" pitchFamily="18" charset="0"/>
+                <a:ea typeface="KaiTi" panose="02010609060101010101" pitchFamily="49" charset="-122"/>
+              </a:rPr>
+              <a:t>nvestment</a:t>
+            </a:r>
+            <a:r>
+              <a:rPr lang="en-CN" b="1" i="1" dirty="0">
+                <a:solidFill>
+                  <a:srgbClr val="C00000"/>
+                </a:solidFill>
+                <a:effectLst/>
+              </a:rPr>
+              <a:t> </a:t>
+            </a:r>
+            <a:endParaRPr lang="en-CN" b="1" i="1" dirty="0">
+              <a:solidFill>
+                <a:srgbClr val="C00000"/>
+              </a:solidFill>
+            </a:endParaRPr>
+          </a:p>
+        </p:txBody>
+      </p:sp>
+    </p:spTree>
+    <p:extLst>
+      <p:ext uri="{BB962C8B-B14F-4D97-AF65-F5344CB8AC3E}">
+        <p14:creationId xmlns:p14="http://schemas.microsoft.com/office/powerpoint/2010/main" val="2896180752"/>
+      </p:ext>
+    </p:extLst>
+  </p:cSld>
+  <p:clrMapOvr>
+    <a:masterClrMapping/>
+  </p:clrMapOvr>
+</p:sld>
+</file>
+
+<file path=ppt/slides/slide3.xml><?xml version="1.0" encoding="utf-8"?>
+<p:sld xmlns:a="http://schemas.openxmlformats.org/drawingml/2006/main" xmlns:r="http://schemas.openxmlformats.org/officeDocument/2006/relationships" xmlns:p="http://schemas.openxmlformats.org/presentationml/2006/main">
+  <p:cSld>
+    <p:spTree>
+      <p:nvGrpSpPr>
+        <p:cNvPr id="1" name=""/>
+        <p:cNvGrpSpPr/>
+        <p:nvPr/>
+      </p:nvGrpSpPr>
+      <p:grpSpPr>
+        <a:xfrm>
+          <a:off x="0" y="0"/>
+          <a:ext cx="0" cy="0"/>
+          <a:chOff x="0" y="0"/>
+          <a:chExt cx="0" cy="0"/>
+        </a:xfrm>
+      </p:grpSpPr>
+      <p:grpSp>
+        <p:nvGrpSpPr>
+          <p:cNvPr id="133" name="Group 132">
+            <a:extLst>
+              <a:ext uri="{FF2B5EF4-FFF2-40B4-BE49-F238E27FC236}">
+                <a16:creationId xmlns:a16="http://schemas.microsoft.com/office/drawing/2014/main" id="{58D4D0AD-2AC1-8E47-BCB0-855240F55240}"/>
+              </a:ext>
+            </a:extLst>
+          </p:cNvPr>
+          <p:cNvGrpSpPr/>
+          <p:nvPr/>
+        </p:nvGrpSpPr>
+        <p:grpSpPr>
+          <a:xfrm>
+            <a:off x="734289" y="1108369"/>
+            <a:ext cx="10723421" cy="4641262"/>
+            <a:chOff x="734288" y="551932"/>
+            <a:chExt cx="10723421" cy="4641262"/>
+          </a:xfrm>
+        </p:grpSpPr>
+        <p:sp>
+          <p:nvSpPr>
+            <p:cNvPr id="23" name="Rounded Rectangle 22">
+              <a:extLst>
+                <a:ext uri="{FF2B5EF4-FFF2-40B4-BE49-F238E27FC236}">
+                  <a16:creationId xmlns:a16="http://schemas.microsoft.com/office/drawing/2014/main" id="{97642420-C186-8B4D-B7BF-1B1A13AC88DC}"/>
+                </a:ext>
+              </a:extLst>
+            </p:cNvPr>
+            <p:cNvSpPr/>
+            <p:nvPr/>
+          </p:nvSpPr>
+          <p:spPr>
+            <a:xfrm>
+              <a:off x="734290" y="551932"/>
+              <a:ext cx="10723419" cy="2556164"/>
+            </a:xfrm>
+            <a:prstGeom prst="roundRect">
+              <a:avLst>
+                <a:gd name="adj" fmla="val 2453"/>
+              </a:avLst>
+            </a:prstGeom>
+            <a:noFill/>
+            <a:ln w="19050">
+              <a:solidFill>
+                <a:srgbClr val="7030A0"/>
+              </a:solidFill>
+              <a:prstDash val="solid"/>
+            </a:ln>
+            <a:effectLst>
+              <a:outerShdw blurRad="50800" dist="38100" dir="2700000" algn="tl" rotWithShape="0">
+                <a:prstClr val="black">
+                  <a:alpha val="40000"/>
+                </a:prstClr>
+              </a:outerShdw>
+            </a:effectLst>
+          </p:spPr>
+          <p:style>
+            <a:lnRef idx="2">
+              <a:schemeClr val="accent1">
+                <a:shade val="50000"/>
+              </a:schemeClr>
+            </a:lnRef>
+            <a:fillRef idx="1">
+              <a:schemeClr val="accent1"/>
+            </a:fillRef>
+            <a:effectRef idx="0">
+              <a:schemeClr val="accent1"/>
+            </a:effectRef>
+            <a:fontRef idx="minor">
+              <a:schemeClr val="lt1"/>
+            </a:fontRef>
+          </p:style>
+          <p:txBody>
+            <a:bodyPr rtlCol="0" anchor="t"/>
+            <a:lstStyle/>
+            <a:p>
+              <a:endParaRPr lang="en-CN" b="1" i="1" dirty="0">
+                <a:solidFill>
+                  <a:srgbClr val="C00000"/>
+                </a:solidFill>
+                <a:latin typeface="Times New Roman" panose="02020603050405020304" pitchFamily="18" charset="0"/>
+                <a:ea typeface="KaiTi" panose="02010609060101010101" pitchFamily="49" charset="-122"/>
+                <a:cs typeface="Times New Roman" panose="02020603050405020304" pitchFamily="18" charset="0"/>
+              </a:endParaRPr>
+            </a:p>
+          </p:txBody>
+        </p:sp>
+        <p:sp>
+          <p:nvSpPr>
+            <p:cNvPr id="25" name="TextBox 24">
+              <a:extLst>
+                <a:ext uri="{FF2B5EF4-FFF2-40B4-BE49-F238E27FC236}">
+                  <a16:creationId xmlns:a16="http://schemas.microsoft.com/office/drawing/2014/main" id="{08F2BCA6-809B-524D-8840-33E6EA95D04D}"/>
+                </a:ext>
+              </a:extLst>
+            </p:cNvPr>
+            <p:cNvSpPr txBox="1"/>
+            <p:nvPr/>
+          </p:nvSpPr>
+          <p:spPr>
+            <a:xfrm>
+              <a:off x="734290" y="2659910"/>
+              <a:ext cx="2648265" cy="435376"/>
+            </a:xfrm>
+            <a:prstGeom prst="rect">
+              <a:avLst/>
+            </a:prstGeom>
+            <a:noFill/>
+          </p:spPr>
+          <p:txBody>
+            <a:bodyPr wrap="square">
+              <a:spAutoFit/>
+            </a:bodyPr>
+            <a:lstStyle/>
+            <a:p>
+              <a:pPr>
+                <a:lnSpc>
+                  <a:spcPct val="120000"/>
+                </a:lnSpc>
+              </a:pPr>
+              <a:r>
+                <a:rPr lang="en-US" sz="2000" b="1" i="1" dirty="0">
+                  <a:solidFill>
+                    <a:srgbClr val="7030A0"/>
+                  </a:solidFill>
+                  <a:effectLst/>
+                  <a:latin typeface="Times New Roman" panose="02020603050405020304" pitchFamily="18" charset="0"/>
+                  <a:ea typeface="DengXian" panose="02010600030101010101" pitchFamily="2" charset="-122"/>
+                </a:rPr>
+                <a:t>Liquidity Effects</a:t>
+              </a:r>
+              <a:endParaRPr lang="en-CN" sz="2000" b="1" i="1" dirty="0">
+                <a:solidFill>
+                  <a:srgbClr val="7030A0"/>
+                </a:solidFill>
+              </a:endParaRPr>
+            </a:p>
+          </p:txBody>
+        </p:sp>
+        <p:grpSp>
+          <p:nvGrpSpPr>
+            <p:cNvPr id="45" name="Group 44">
+              <a:extLst>
+                <a:ext uri="{FF2B5EF4-FFF2-40B4-BE49-F238E27FC236}">
+                  <a16:creationId xmlns:a16="http://schemas.microsoft.com/office/drawing/2014/main" id="{B39B2B5E-BC16-C44C-87A0-E113D62BF563}"/>
+                </a:ext>
+              </a:extLst>
+            </p:cNvPr>
+            <p:cNvGrpSpPr/>
+            <p:nvPr/>
+          </p:nvGrpSpPr>
+          <p:grpSpPr>
+            <a:xfrm>
+              <a:off x="995420" y="811172"/>
+              <a:ext cx="10201164" cy="2066426"/>
+              <a:chOff x="995417" y="2171936"/>
+              <a:chExt cx="10201164" cy="2066426"/>
+            </a:xfrm>
+          </p:grpSpPr>
+          <p:sp>
+            <p:nvSpPr>
+              <p:cNvPr id="43" name="TextBox 42">
+                <a:extLst>
+                  <a:ext uri="{FF2B5EF4-FFF2-40B4-BE49-F238E27FC236}">
+                    <a16:creationId xmlns:a16="http://schemas.microsoft.com/office/drawing/2014/main" id="{52594EA6-CC43-814B-9A32-4216D516C0BB}"/>
+                  </a:ext>
+                </a:extLst>
+              </p:cNvPr>
+              <p:cNvSpPr txBox="1"/>
+              <p:nvPr/>
+            </p:nvSpPr>
+            <p:spPr>
+              <a:xfrm>
+                <a:off x="4820851" y="2942910"/>
+                <a:ext cx="2550289" cy="584775"/>
+              </a:xfrm>
+              <a:prstGeom prst="rect">
+                <a:avLst/>
+              </a:prstGeom>
+              <a:noFill/>
+            </p:spPr>
+            <p:txBody>
+              <a:bodyPr wrap="square">
+                <a:spAutoFit/>
+              </a:bodyPr>
+              <a:lstStyle/>
+              <a:p>
+                <a:pPr algn="ctr"/>
+                <a:r>
+                  <a:rPr lang="en-US" sz="1600" b="1" i="1" dirty="0">
+                    <a:solidFill>
+                      <a:srgbClr val="7030A0"/>
+                    </a:solidFill>
+                    <a:latin typeface="Times New Roman" panose="02020603050405020304" pitchFamily="18" charset="0"/>
+                    <a:ea typeface="DengXian" panose="02010600030101010101" pitchFamily="2" charset="-122"/>
+                  </a:rPr>
+                  <a:t>Get Liquidity </a:t>
+                </a:r>
+                <a:r>
+                  <a:rPr lang="en-US" altLang="zh-CN" sz="1600" b="1" i="1" dirty="0">
+                    <a:solidFill>
+                      <a:srgbClr val="7030A0"/>
+                    </a:solidFill>
+                    <a:latin typeface="Times New Roman" panose="02020603050405020304" pitchFamily="18" charset="0"/>
+                    <a:ea typeface="DengXian" panose="02010600030101010101" pitchFamily="2" charset="-122"/>
+                  </a:rPr>
+                  <a:t>(500 Billion)</a:t>
+                </a:r>
+                <a:r>
+                  <a:rPr lang="en-US" sz="1600" b="1" i="1" dirty="0">
+                    <a:solidFill>
+                      <a:srgbClr val="7030A0"/>
+                    </a:solidFill>
+                    <a:latin typeface="Times New Roman" panose="02020603050405020304" pitchFamily="18" charset="0"/>
+                    <a:ea typeface="DengXian" panose="02010600030101010101" pitchFamily="2" charset="-122"/>
+                  </a:rPr>
+                  <a:t> and Buy Stock</a:t>
+                </a:r>
+                <a:endParaRPr lang="en-CN" sz="1600" dirty="0">
+                  <a:solidFill>
+                    <a:srgbClr val="7030A0"/>
+                  </a:solidFill>
+                </a:endParaRPr>
+              </a:p>
+            </p:txBody>
+          </p:sp>
+          <p:sp>
+            <p:nvSpPr>
+              <p:cNvPr id="4" name="Rectangle 3">
+                <a:extLst>
+                  <a:ext uri="{FF2B5EF4-FFF2-40B4-BE49-F238E27FC236}">
+                    <a16:creationId xmlns:a16="http://schemas.microsoft.com/office/drawing/2014/main" id="{4F60944C-3D66-3D49-8AE4-6598589EAF05}"/>
+                  </a:ext>
+                </a:extLst>
+              </p:cNvPr>
+              <p:cNvSpPr/>
+              <p:nvPr/>
+            </p:nvSpPr>
+            <p:spPr>
+              <a:xfrm>
+                <a:off x="995417" y="2239136"/>
+                <a:ext cx="2550289" cy="646495"/>
+              </a:xfrm>
+              <a:prstGeom prst="rect">
+                <a:avLst/>
+              </a:prstGeom>
+              <a:solidFill>
+                <a:schemeClr val="accent6">
+                  <a:lumMod val="20000"/>
+                  <a:lumOff val="80000"/>
+                </a:schemeClr>
+              </a:solidFill>
+              <a:ln w="19050">
+                <a:solidFill>
+                  <a:schemeClr val="tx1"/>
+                </a:solidFill>
+                <a:prstDash val="dash"/>
+              </a:ln>
+              <a:effectLst>
+                <a:outerShdw blurRad="50800" dist="38100" dir="2700000" algn="tl" rotWithShape="0">
+                  <a:prstClr val="black">
+                    <a:alpha val="40000"/>
+                  </a:prstClr>
+                </a:outerShdw>
+              </a:effectLst>
+            </p:spPr>
+            <p:style>
+              <a:lnRef idx="2">
+                <a:schemeClr val="accent1">
+                  <a:shade val="50000"/>
+                </a:schemeClr>
+              </a:lnRef>
+              <a:fillRef idx="1">
+                <a:schemeClr val="accent1"/>
+              </a:fillRef>
+              <a:effectRef idx="0">
+                <a:schemeClr val="accent1"/>
+              </a:effectRef>
+              <a:fontRef idx="minor">
+                <a:schemeClr val="lt1"/>
+              </a:fontRef>
+            </p:style>
+            <p:txBody>
+              <a:bodyPr rtlCol="0" anchor="ctr"/>
+              <a:lstStyle/>
+              <a:p>
+                <a:pPr algn="ctr"/>
+                <a:r>
+                  <a:rPr lang="en-CN" b="1" dirty="0">
+                    <a:solidFill>
+                      <a:schemeClr val="tx1"/>
+                    </a:solidFill>
+                    <a:latin typeface="Times New Roman" panose="02020603050405020304" pitchFamily="18" charset="0"/>
+                    <a:cs typeface="Times New Roman" panose="02020603050405020304" pitchFamily="18" charset="0"/>
+                  </a:rPr>
+                  <a:t>PBOC</a:t>
+                </a:r>
+              </a:p>
+            </p:txBody>
+          </p:sp>
+          <p:sp>
+            <p:nvSpPr>
+              <p:cNvPr id="5" name="Rectangle 4">
+                <a:extLst>
+                  <a:ext uri="{FF2B5EF4-FFF2-40B4-BE49-F238E27FC236}">
+                    <a16:creationId xmlns:a16="http://schemas.microsoft.com/office/drawing/2014/main" id="{20240FAF-AC19-144F-A21A-BDDF43AAF3A8}"/>
+                  </a:ext>
+                </a:extLst>
+              </p:cNvPr>
+              <p:cNvSpPr/>
+              <p:nvPr/>
+            </p:nvSpPr>
+            <p:spPr>
+              <a:xfrm>
+                <a:off x="4820853" y="2234681"/>
+                <a:ext cx="2550289" cy="646495"/>
+              </a:xfrm>
+              <a:prstGeom prst="rect">
+                <a:avLst/>
+              </a:prstGeom>
+              <a:solidFill>
+                <a:schemeClr val="accent6">
+                  <a:lumMod val="20000"/>
+                  <a:lumOff val="80000"/>
+                </a:schemeClr>
+              </a:solidFill>
+              <a:ln w="19050">
+                <a:solidFill>
+                  <a:schemeClr val="tx1"/>
+                </a:solidFill>
+                <a:prstDash val="dash"/>
+              </a:ln>
+              <a:effectLst>
+                <a:outerShdw blurRad="50800" dist="38100" dir="2700000" algn="tl" rotWithShape="0">
+                  <a:prstClr val="black">
+                    <a:alpha val="40000"/>
+                  </a:prstClr>
+                </a:outerShdw>
+              </a:effectLst>
+            </p:spPr>
+            <p:style>
+              <a:lnRef idx="2">
+                <a:schemeClr val="accent1">
+                  <a:shade val="50000"/>
+                </a:schemeClr>
+              </a:lnRef>
+              <a:fillRef idx="1">
+                <a:schemeClr val="accent1"/>
+              </a:fillRef>
+              <a:effectRef idx="0">
+                <a:schemeClr val="accent1"/>
+              </a:effectRef>
+              <a:fontRef idx="minor">
+                <a:schemeClr val="lt1"/>
+              </a:fontRef>
+            </p:style>
+            <p:txBody>
+              <a:bodyPr rtlCol="0" anchor="ctr"/>
+              <a:lstStyle/>
+              <a:p>
+                <a:pPr algn="ctr"/>
+                <a:r>
+                  <a:rPr lang="en-US" sz="1600" b="1" dirty="0">
+                    <a:solidFill>
+                      <a:srgbClr val="000000"/>
+                    </a:solidFill>
+                    <a:effectLst/>
+                    <a:latin typeface="Times New Roman" panose="02020603050405020304" pitchFamily="18" charset="0"/>
+                    <a:ea typeface="KaiTi" panose="02010609060101010101" pitchFamily="49" charset="-122"/>
+                  </a:rPr>
+                  <a:t>NBFIs: Securities, Funds and Insurance Companies</a:t>
+                </a:r>
+                <a:r>
+                  <a:rPr lang="en-CN" sz="1600" b="1" dirty="0">
+                    <a:effectLst/>
+                  </a:rPr>
+                  <a:t> </a:t>
+                </a:r>
+                <a:endParaRPr lang="en-CN" sz="1600" b="1" dirty="0">
+                  <a:solidFill>
+                    <a:schemeClr val="tx1"/>
+                  </a:solidFill>
+                  <a:latin typeface="Times New Roman" panose="02020603050405020304" pitchFamily="18" charset="0"/>
+                  <a:cs typeface="Times New Roman" panose="02020603050405020304" pitchFamily="18" charset="0"/>
+                </a:endParaRPr>
+              </a:p>
+            </p:txBody>
+          </p:sp>
+          <p:sp>
+            <p:nvSpPr>
+              <p:cNvPr id="6" name="Rectangle 5">
+                <a:extLst>
+                  <a:ext uri="{FF2B5EF4-FFF2-40B4-BE49-F238E27FC236}">
+                    <a16:creationId xmlns:a16="http://schemas.microsoft.com/office/drawing/2014/main" id="{0FE209DF-2BDC-F14B-9140-061A7A4C28A8}"/>
+                  </a:ext>
+                </a:extLst>
+              </p:cNvPr>
+              <p:cNvSpPr/>
+              <p:nvPr/>
+            </p:nvSpPr>
+            <p:spPr>
+              <a:xfrm>
+                <a:off x="8646292" y="2243135"/>
+                <a:ext cx="2550289" cy="646495"/>
+              </a:xfrm>
+              <a:prstGeom prst="rect">
+                <a:avLst/>
+              </a:prstGeom>
+              <a:solidFill>
+                <a:schemeClr val="accent6">
+                  <a:lumMod val="20000"/>
+                  <a:lumOff val="80000"/>
+                </a:schemeClr>
+              </a:solidFill>
+              <a:ln w="19050">
+                <a:solidFill>
+                  <a:schemeClr val="tx1"/>
+                </a:solidFill>
+                <a:prstDash val="dash"/>
+              </a:ln>
+              <a:effectLst>
+                <a:outerShdw blurRad="50800" dist="38100" dir="2700000" algn="tl" rotWithShape="0">
+                  <a:prstClr val="black">
+                    <a:alpha val="40000"/>
+                  </a:prstClr>
+                </a:outerShdw>
+              </a:effectLst>
+            </p:spPr>
+            <p:style>
+              <a:lnRef idx="2">
+                <a:schemeClr val="accent1">
+                  <a:shade val="50000"/>
+                </a:schemeClr>
+              </a:lnRef>
+              <a:fillRef idx="1">
+                <a:schemeClr val="accent1"/>
+              </a:fillRef>
+              <a:effectRef idx="0">
+                <a:schemeClr val="accent1"/>
+              </a:effectRef>
+              <a:fontRef idx="minor">
+                <a:schemeClr val="lt1"/>
+              </a:fontRef>
+            </p:style>
+            <p:txBody>
+              <a:bodyPr rtlCol="0" anchor="ctr"/>
+              <a:lstStyle/>
+              <a:p>
+                <a:pPr algn="ctr"/>
+                <a:r>
+                  <a:rPr lang="en-US" b="1" dirty="0">
+                    <a:solidFill>
+                      <a:schemeClr val="tx1"/>
+                    </a:solidFill>
+                    <a:latin typeface="Times New Roman" panose="02020603050405020304" pitchFamily="18" charset="0"/>
+                    <a:cs typeface="Times New Roman" panose="02020603050405020304" pitchFamily="18" charset="0"/>
+                  </a:rPr>
+                  <a:t>Secondary Market</a:t>
+                </a:r>
+                <a:endParaRPr lang="en-CN" b="1" dirty="0">
+                  <a:solidFill>
+                    <a:schemeClr val="tx1"/>
+                  </a:solidFill>
+                  <a:latin typeface="Times New Roman" panose="02020603050405020304" pitchFamily="18" charset="0"/>
+                  <a:cs typeface="Times New Roman" panose="02020603050405020304" pitchFamily="18" charset="0"/>
+                </a:endParaRPr>
+              </a:p>
+            </p:txBody>
+          </p:sp>
+          <p:grpSp>
+            <p:nvGrpSpPr>
+              <p:cNvPr id="30" name="Group 29">
+                <a:extLst>
+                  <a:ext uri="{FF2B5EF4-FFF2-40B4-BE49-F238E27FC236}">
+                    <a16:creationId xmlns:a16="http://schemas.microsoft.com/office/drawing/2014/main" id="{BFBCFA4C-D521-0741-96DF-1B05242E4F8E}"/>
+                  </a:ext>
+                </a:extLst>
+              </p:cNvPr>
+              <p:cNvGrpSpPr/>
+              <p:nvPr/>
+            </p:nvGrpSpPr>
+            <p:grpSpPr>
+              <a:xfrm>
+                <a:off x="3864099" y="2181354"/>
+                <a:ext cx="638360" cy="771983"/>
+                <a:chOff x="3444604" y="2236474"/>
+                <a:chExt cx="748146" cy="904749"/>
+              </a:xfrm>
+            </p:grpSpPr>
+            <p:sp>
+              <p:nvSpPr>
+                <p:cNvPr id="26" name="Donut 25">
+                  <a:extLst>
+                    <a:ext uri="{FF2B5EF4-FFF2-40B4-BE49-F238E27FC236}">
+                      <a16:creationId xmlns:a16="http://schemas.microsoft.com/office/drawing/2014/main" id="{6916306F-CA3A-B346-AC75-5162A7A84B40}"/>
+                    </a:ext>
+                  </a:extLst>
+                </p:cNvPr>
+                <p:cNvSpPr/>
+                <p:nvPr/>
+              </p:nvSpPr>
+              <p:spPr>
+                <a:xfrm>
+                  <a:off x="3444604" y="2318414"/>
+                  <a:ext cx="748146" cy="748146"/>
+                </a:xfrm>
+                <a:prstGeom prst="donut">
+                  <a:avLst>
+                    <a:gd name="adj" fmla="val 15029"/>
+                  </a:avLst>
+                </a:prstGeom>
+                <a:solidFill>
+                  <a:schemeClr val="accent2">
+                    <a:lumMod val="20000"/>
+                    <a:lumOff val="80000"/>
+                  </a:schemeClr>
+                </a:solidFill>
+                <a:ln w="19050">
+                  <a:solidFill>
+                    <a:schemeClr val="accent2">
+                      <a:lumMod val="50000"/>
+                    </a:schemeClr>
+                  </a:solidFill>
+                </a:ln>
+              </p:spPr>
+              <p:style>
+                <a:lnRef idx="2">
+                  <a:schemeClr val="accent1">
+                    <a:shade val="50000"/>
+                  </a:schemeClr>
+                </a:lnRef>
+                <a:fillRef idx="1">
+                  <a:schemeClr val="accent1"/>
+                </a:fillRef>
+                <a:effectRef idx="0">
+                  <a:schemeClr val="accent1"/>
+                </a:effectRef>
+                <a:fontRef idx="minor">
+                  <a:schemeClr val="lt1"/>
+                </a:fontRef>
+              </p:style>
+              <p:txBody>
+                <a:bodyPr rtlCol="0" anchor="ctr"/>
+                <a:lstStyle/>
+                <a:p>
+                  <a:pPr algn="ctr"/>
+                  <a:endParaRPr lang="en-CN">
+                    <a:solidFill>
+                      <a:schemeClr val="tx1"/>
+                    </a:solidFill>
+                  </a:endParaRPr>
+                </a:p>
+              </p:txBody>
+            </p:sp>
+            <p:sp>
+              <p:nvSpPr>
+                <p:cNvPr id="27" name="Chevron 26">
+                  <a:extLst>
+                    <a:ext uri="{FF2B5EF4-FFF2-40B4-BE49-F238E27FC236}">
+                      <a16:creationId xmlns:a16="http://schemas.microsoft.com/office/drawing/2014/main" id="{6BAE6E55-DB2E-F548-BDBA-A9BFDC01AE0A}"/>
+                    </a:ext>
+                  </a:extLst>
+                </p:cNvPr>
+                <p:cNvSpPr/>
+                <p:nvPr/>
+              </p:nvSpPr>
+              <p:spPr>
+                <a:xfrm rot="10800000">
+                  <a:off x="3725167" y="2236474"/>
+                  <a:ext cx="187019" cy="258365"/>
+                </a:xfrm>
+                <a:prstGeom prst="chevron">
+                  <a:avLst/>
+                </a:prstGeom>
+                <a:solidFill>
+                  <a:schemeClr val="accent2">
+                    <a:lumMod val="20000"/>
+                    <a:lumOff val="80000"/>
+                  </a:schemeClr>
+                </a:solidFill>
+                <a:ln w="19050">
+                  <a:solidFill>
+                    <a:schemeClr val="accent2">
+                      <a:lumMod val="50000"/>
+                    </a:schemeClr>
+                  </a:solidFill>
+                </a:ln>
+              </p:spPr>
+              <p:style>
+                <a:lnRef idx="2">
+                  <a:schemeClr val="accent1">
+                    <a:shade val="50000"/>
+                  </a:schemeClr>
+                </a:lnRef>
+                <a:fillRef idx="1">
+                  <a:schemeClr val="accent1"/>
+                </a:fillRef>
+                <a:effectRef idx="0">
+                  <a:schemeClr val="accent1"/>
+                </a:effectRef>
+                <a:fontRef idx="minor">
+                  <a:schemeClr val="lt1"/>
+                </a:fontRef>
+              </p:style>
+              <p:txBody>
+                <a:bodyPr rtlCol="0" anchor="ctr"/>
+                <a:lstStyle/>
+                <a:p>
+                  <a:pPr algn="ctr"/>
+                  <a:endParaRPr lang="en-CN">
+                    <a:solidFill>
+                      <a:schemeClr val="tx1"/>
+                    </a:solidFill>
+                  </a:endParaRPr>
+                </a:p>
+              </p:txBody>
+            </p:sp>
+            <p:sp>
+              <p:nvSpPr>
+                <p:cNvPr id="28" name="Chevron 27">
+                  <a:extLst>
+                    <a:ext uri="{FF2B5EF4-FFF2-40B4-BE49-F238E27FC236}">
+                      <a16:creationId xmlns:a16="http://schemas.microsoft.com/office/drawing/2014/main" id="{5E92B4B3-EA44-E64F-BFE9-26D94E8759F8}"/>
+                    </a:ext>
+                  </a:extLst>
+                </p:cNvPr>
+                <p:cNvSpPr/>
+                <p:nvPr/>
+              </p:nvSpPr>
+              <p:spPr>
+                <a:xfrm>
+                  <a:off x="3725168" y="2882857"/>
+                  <a:ext cx="187018" cy="258366"/>
+                </a:xfrm>
+                <a:prstGeom prst="chevron">
+                  <a:avLst/>
+                </a:prstGeom>
+                <a:solidFill>
+                  <a:schemeClr val="accent2">
+                    <a:lumMod val="20000"/>
+                    <a:lumOff val="80000"/>
+                  </a:schemeClr>
+                </a:solidFill>
+                <a:ln w="19050">
+                  <a:solidFill>
+                    <a:schemeClr val="accent2">
+                      <a:lumMod val="50000"/>
+                    </a:schemeClr>
+                  </a:solidFill>
+                </a:ln>
+              </p:spPr>
+              <p:style>
+                <a:lnRef idx="2">
+                  <a:schemeClr val="accent1">
+                    <a:shade val="50000"/>
+                  </a:schemeClr>
+                </a:lnRef>
+                <a:fillRef idx="1">
+                  <a:schemeClr val="accent1"/>
+                </a:fillRef>
+                <a:effectRef idx="0">
+                  <a:schemeClr val="accent1"/>
+                </a:effectRef>
+                <a:fontRef idx="minor">
+                  <a:schemeClr val="lt1"/>
+                </a:fontRef>
+              </p:style>
+              <p:txBody>
+                <a:bodyPr rtlCol="0" anchor="ctr"/>
+                <a:lstStyle/>
+                <a:p>
+                  <a:pPr algn="ctr"/>
+                  <a:endParaRPr lang="en-CN">
+                    <a:solidFill>
+                      <a:schemeClr val="tx1"/>
+                    </a:solidFill>
+                  </a:endParaRPr>
+                </a:p>
+              </p:txBody>
+            </p:sp>
+          </p:grpSp>
+          <p:sp>
+            <p:nvSpPr>
+              <p:cNvPr id="29" name="TextBox 28">
+                <a:extLst>
+                  <a:ext uri="{FF2B5EF4-FFF2-40B4-BE49-F238E27FC236}">
+                    <a16:creationId xmlns:a16="http://schemas.microsoft.com/office/drawing/2014/main" id="{AC289CF5-8D5B-7048-BDBA-85A4E17E0F28}"/>
+                  </a:ext>
+                </a:extLst>
+              </p:cNvPr>
+              <p:cNvSpPr txBox="1"/>
+              <p:nvPr/>
+            </p:nvSpPr>
+            <p:spPr>
+              <a:xfrm>
+                <a:off x="995418" y="3005323"/>
+                <a:ext cx="3187868" cy="584775"/>
+              </a:xfrm>
+              <a:prstGeom prst="rect">
+                <a:avLst/>
+              </a:prstGeom>
+              <a:noFill/>
+            </p:spPr>
+            <p:txBody>
+              <a:bodyPr wrap="square">
+                <a:spAutoFit/>
+              </a:bodyPr>
+              <a:lstStyle/>
+              <a:p>
+                <a:pPr algn="ctr"/>
+                <a:r>
+                  <a:rPr lang="en-US" sz="1600" b="1" i="1" dirty="0">
+                    <a:solidFill>
+                      <a:schemeClr val="accent2">
+                        <a:lumMod val="50000"/>
+                      </a:schemeClr>
+                    </a:solidFill>
+                    <a:latin typeface="Times New Roman" panose="02020603050405020304" pitchFamily="18" charset="0"/>
+                    <a:ea typeface="DengXian" panose="02010600030101010101" pitchFamily="2" charset="-122"/>
+                  </a:rPr>
+                  <a:t>C</a:t>
+                </a:r>
+                <a:r>
+                  <a:rPr lang="en-US" sz="1600" b="1" i="1" dirty="0">
+                    <a:solidFill>
+                      <a:schemeClr val="accent2">
+                        <a:lumMod val="50000"/>
+                      </a:schemeClr>
+                    </a:solidFill>
+                    <a:effectLst/>
+                    <a:latin typeface="Times New Roman" panose="02020603050405020304" pitchFamily="18" charset="0"/>
+                    <a:ea typeface="DengXian" panose="02010600030101010101" pitchFamily="2" charset="-122"/>
+                  </a:rPr>
+                  <a:t>onversion 1: </a:t>
+                </a:r>
+                <a:r>
+                  <a:rPr lang="en-US" sz="1600" i="1" dirty="0">
+                    <a:solidFill>
+                      <a:schemeClr val="accent2">
+                        <a:lumMod val="50000"/>
+                      </a:schemeClr>
+                    </a:solidFill>
+                    <a:effectLst/>
+                    <a:latin typeface="Times New Roman" panose="02020603050405020304" pitchFamily="18" charset="0"/>
+                    <a:ea typeface="DengXian" panose="02010600030101010101" pitchFamily="2" charset="-122"/>
+                  </a:rPr>
+                  <a:t>Pledge</a:t>
+                </a:r>
+                <a:r>
+                  <a:rPr lang="en-US" sz="1600" b="1" dirty="0">
+                    <a:solidFill>
+                      <a:schemeClr val="accent2">
+                        <a:lumMod val="50000"/>
+                      </a:schemeClr>
+                    </a:solidFill>
+                    <a:effectLst/>
+                    <a:latin typeface="Times New Roman" panose="02020603050405020304" pitchFamily="18" charset="0"/>
+                    <a:ea typeface="DengXian" panose="02010600030101010101" pitchFamily="2" charset="-122"/>
+                  </a:rPr>
+                  <a:t> </a:t>
+                </a:r>
+                <a:r>
+                  <a:rPr lang="en-US" sz="1600" dirty="0">
+                    <a:solidFill>
+                      <a:schemeClr val="accent2">
+                        <a:lumMod val="50000"/>
+                      </a:schemeClr>
+                    </a:solidFill>
+                    <a:effectLst/>
+                    <a:latin typeface="Times New Roman" panose="02020603050405020304" pitchFamily="18" charset="0"/>
+                    <a:ea typeface="DengXian" panose="02010600030101010101" pitchFamily="2" charset="-122"/>
+                  </a:rPr>
+                  <a:t>for high-quality and high</a:t>
+                </a:r>
+                <a:r>
+                  <a:rPr lang="en-US" altLang="zh-CN" sz="1600" dirty="0">
+                    <a:solidFill>
+                      <a:schemeClr val="accent2">
+                        <a:lumMod val="50000"/>
+                      </a:schemeClr>
+                    </a:solidFill>
+                    <a:effectLst/>
+                    <a:latin typeface="Times New Roman" panose="02020603050405020304" pitchFamily="18" charset="0"/>
+                    <a:ea typeface="DengXian" panose="02010600030101010101" pitchFamily="2" charset="-122"/>
+                  </a:rPr>
+                  <a:t>-</a:t>
+                </a:r>
+                <a:r>
+                  <a:rPr lang="en-US" sz="1600" dirty="0">
+                    <a:solidFill>
+                      <a:schemeClr val="accent2">
+                        <a:lumMod val="50000"/>
+                      </a:schemeClr>
+                    </a:solidFill>
+                    <a:effectLst/>
+                    <a:latin typeface="Times New Roman" panose="02020603050405020304" pitchFamily="18" charset="0"/>
+                    <a:ea typeface="DengXian" panose="02010600030101010101" pitchFamily="2" charset="-122"/>
+                  </a:rPr>
+                  <a:t>liquidity assets</a:t>
+                </a:r>
+                <a:endParaRPr lang="en-CN" sz="1600" dirty="0">
+                  <a:solidFill>
+                    <a:schemeClr val="accent2">
+                      <a:lumMod val="50000"/>
+                    </a:schemeClr>
+                  </a:solidFill>
+                </a:endParaRPr>
+              </a:p>
+            </p:txBody>
+          </p:sp>
+          <p:grpSp>
+            <p:nvGrpSpPr>
+              <p:cNvPr id="31" name="Group 30">
+                <a:extLst>
+                  <a:ext uri="{FF2B5EF4-FFF2-40B4-BE49-F238E27FC236}">
+                    <a16:creationId xmlns:a16="http://schemas.microsoft.com/office/drawing/2014/main" id="{F8C2B820-9A67-BC41-A592-8812DA4E418B}"/>
+                  </a:ext>
+                </a:extLst>
+              </p:cNvPr>
+              <p:cNvGrpSpPr/>
+              <p:nvPr/>
+            </p:nvGrpSpPr>
+            <p:grpSpPr>
+              <a:xfrm>
+                <a:off x="7689536" y="2171936"/>
+                <a:ext cx="638360" cy="771983"/>
+                <a:chOff x="3444604" y="2236474"/>
+                <a:chExt cx="748146" cy="904749"/>
+              </a:xfrm>
+              <a:solidFill>
+                <a:schemeClr val="accent5">
+                  <a:lumMod val="20000"/>
+                  <a:lumOff val="80000"/>
+                </a:schemeClr>
+              </a:solidFill>
+            </p:grpSpPr>
+            <p:sp>
+              <p:nvSpPr>
+                <p:cNvPr id="32" name="Donut 31">
+                  <a:extLst>
+                    <a:ext uri="{FF2B5EF4-FFF2-40B4-BE49-F238E27FC236}">
+                      <a16:creationId xmlns:a16="http://schemas.microsoft.com/office/drawing/2014/main" id="{5EE122E2-E9E9-6549-AF84-A449FF4A244D}"/>
+                    </a:ext>
+                  </a:extLst>
+                </p:cNvPr>
+                <p:cNvSpPr/>
+                <p:nvPr/>
+              </p:nvSpPr>
+              <p:spPr>
+                <a:xfrm>
+                  <a:off x="3444604" y="2318414"/>
+                  <a:ext cx="748146" cy="748146"/>
+                </a:xfrm>
+                <a:prstGeom prst="donut">
+                  <a:avLst>
+                    <a:gd name="adj" fmla="val 15029"/>
+                  </a:avLst>
+                </a:prstGeom>
+                <a:grpFill/>
+                <a:ln w="19050">
+                  <a:solidFill>
+                    <a:schemeClr val="accent5">
+                      <a:lumMod val="50000"/>
+                    </a:schemeClr>
+                  </a:solidFill>
+                </a:ln>
+              </p:spPr>
+              <p:style>
+                <a:lnRef idx="2">
+                  <a:schemeClr val="accent1">
+                    <a:shade val="50000"/>
+                  </a:schemeClr>
+                </a:lnRef>
+                <a:fillRef idx="1">
+                  <a:schemeClr val="accent1"/>
+                </a:fillRef>
+                <a:effectRef idx="0">
+                  <a:schemeClr val="accent1"/>
+                </a:effectRef>
+                <a:fontRef idx="minor">
+                  <a:schemeClr val="lt1"/>
+                </a:fontRef>
+              </p:style>
+              <p:txBody>
+                <a:bodyPr rtlCol="0" anchor="ctr"/>
+                <a:lstStyle/>
+                <a:p>
+                  <a:pPr algn="ctr"/>
+                  <a:endParaRPr lang="en-CN">
+                    <a:solidFill>
+                      <a:schemeClr val="tx1"/>
+                    </a:solidFill>
+                  </a:endParaRPr>
+                </a:p>
+              </p:txBody>
+            </p:sp>
+            <p:sp>
+              <p:nvSpPr>
+                <p:cNvPr id="33" name="Chevron 32">
+                  <a:extLst>
+                    <a:ext uri="{FF2B5EF4-FFF2-40B4-BE49-F238E27FC236}">
+                      <a16:creationId xmlns:a16="http://schemas.microsoft.com/office/drawing/2014/main" id="{CF2D3F03-DBA5-3645-856E-776BF2F95313}"/>
+                    </a:ext>
+                  </a:extLst>
+                </p:cNvPr>
+                <p:cNvSpPr/>
+                <p:nvPr/>
+              </p:nvSpPr>
+              <p:spPr>
+                <a:xfrm rot="10800000">
+                  <a:off x="3725167" y="2236474"/>
+                  <a:ext cx="187019" cy="258365"/>
+                </a:xfrm>
+                <a:prstGeom prst="chevron">
+                  <a:avLst/>
+                </a:prstGeom>
+                <a:grpFill/>
+                <a:ln w="19050">
+                  <a:solidFill>
+                    <a:schemeClr val="accent5">
+                      <a:lumMod val="50000"/>
+                    </a:schemeClr>
+                  </a:solidFill>
+                </a:ln>
+              </p:spPr>
+              <p:style>
+                <a:lnRef idx="2">
+                  <a:schemeClr val="accent1">
+                    <a:shade val="50000"/>
+                  </a:schemeClr>
+                </a:lnRef>
+                <a:fillRef idx="1">
+                  <a:schemeClr val="accent1"/>
+                </a:fillRef>
+                <a:effectRef idx="0">
+                  <a:schemeClr val="accent1"/>
+                </a:effectRef>
+                <a:fontRef idx="minor">
+                  <a:schemeClr val="lt1"/>
+                </a:fontRef>
+              </p:style>
+              <p:txBody>
+                <a:bodyPr rtlCol="0" anchor="ctr"/>
+                <a:lstStyle/>
+                <a:p>
+                  <a:pPr algn="ctr"/>
+                  <a:endParaRPr lang="en-CN">
+                    <a:solidFill>
+                      <a:schemeClr val="tx1"/>
+                    </a:solidFill>
+                  </a:endParaRPr>
+                </a:p>
+              </p:txBody>
+            </p:sp>
+            <p:sp>
+              <p:nvSpPr>
+                <p:cNvPr id="34" name="Chevron 33">
+                  <a:extLst>
+                    <a:ext uri="{FF2B5EF4-FFF2-40B4-BE49-F238E27FC236}">
+                      <a16:creationId xmlns:a16="http://schemas.microsoft.com/office/drawing/2014/main" id="{94373761-DFF5-2744-A7F3-874AACD39EA4}"/>
+                    </a:ext>
+                  </a:extLst>
+                </p:cNvPr>
+                <p:cNvSpPr/>
+                <p:nvPr/>
+              </p:nvSpPr>
+              <p:spPr>
+                <a:xfrm>
+                  <a:off x="3725168" y="2882857"/>
+                  <a:ext cx="187018" cy="258366"/>
+                </a:xfrm>
+                <a:prstGeom prst="chevron">
+                  <a:avLst/>
+                </a:prstGeom>
+                <a:grpFill/>
+                <a:ln w="19050">
+                  <a:solidFill>
+                    <a:schemeClr val="accent5">
+                      <a:lumMod val="50000"/>
+                    </a:schemeClr>
+                  </a:solidFill>
+                </a:ln>
+              </p:spPr>
+              <p:style>
+                <a:lnRef idx="2">
+                  <a:schemeClr val="accent1">
+                    <a:shade val="50000"/>
+                  </a:schemeClr>
+                </a:lnRef>
+                <a:fillRef idx="1">
+                  <a:schemeClr val="accent1"/>
+                </a:fillRef>
+                <a:effectRef idx="0">
+                  <a:schemeClr val="accent1"/>
+                </a:effectRef>
+                <a:fontRef idx="minor">
+                  <a:schemeClr val="lt1"/>
+                </a:fontRef>
+              </p:style>
+              <p:txBody>
+                <a:bodyPr rtlCol="0" anchor="ctr"/>
+                <a:lstStyle/>
+                <a:p>
+                  <a:pPr algn="ctr"/>
+                  <a:endParaRPr lang="en-CN">
+                    <a:solidFill>
+                      <a:schemeClr val="tx1"/>
+                    </a:solidFill>
+                  </a:endParaRPr>
+                </a:p>
+              </p:txBody>
+            </p:sp>
+          </p:grpSp>
+          <p:sp>
+            <p:nvSpPr>
+              <p:cNvPr id="39" name="TextBox 38">
+                <a:extLst>
+                  <a:ext uri="{FF2B5EF4-FFF2-40B4-BE49-F238E27FC236}">
+                    <a16:creationId xmlns:a16="http://schemas.microsoft.com/office/drawing/2014/main" id="{0D268550-CB6C-E348-82C9-A7CDFABCBCB9}"/>
+                  </a:ext>
+                </a:extLst>
+              </p:cNvPr>
+              <p:cNvSpPr txBox="1"/>
+              <p:nvPr/>
+            </p:nvSpPr>
+            <p:spPr>
+              <a:xfrm>
+                <a:off x="8008707" y="3006192"/>
+                <a:ext cx="3187868" cy="584775"/>
+              </a:xfrm>
+              <a:prstGeom prst="rect">
+                <a:avLst/>
+              </a:prstGeom>
+              <a:noFill/>
+            </p:spPr>
+            <p:txBody>
+              <a:bodyPr wrap="square">
+                <a:spAutoFit/>
+              </a:bodyPr>
+              <a:lstStyle/>
+              <a:p>
+                <a:pPr algn="ctr"/>
+                <a:r>
+                  <a:rPr lang="en-US" sz="1600" b="1" i="1" dirty="0">
+                    <a:solidFill>
+                      <a:schemeClr val="accent1"/>
+                    </a:solidFill>
+                    <a:latin typeface="Times New Roman" panose="02020603050405020304" pitchFamily="18" charset="0"/>
+                    <a:ea typeface="DengXian" panose="02010600030101010101" pitchFamily="2" charset="-122"/>
+                  </a:rPr>
+                  <a:t>Conversion 2: </a:t>
+                </a:r>
+                <a:r>
+                  <a:rPr lang="en-US" sz="1600" i="1" dirty="0">
+                    <a:solidFill>
+                      <a:schemeClr val="accent1"/>
+                    </a:solidFill>
+                    <a:latin typeface="Times New Roman" panose="02020603050405020304" pitchFamily="18" charset="0"/>
+                    <a:ea typeface="DengXian" panose="02010600030101010101" pitchFamily="2" charset="-122"/>
+                  </a:rPr>
+                  <a:t>Repurchase</a:t>
+                </a:r>
+                <a:r>
+                  <a:rPr lang="en-US" sz="1600" dirty="0">
+                    <a:solidFill>
+                      <a:schemeClr val="accent1"/>
+                    </a:solidFill>
+                    <a:latin typeface="Times New Roman" panose="02020603050405020304" pitchFamily="18" charset="0"/>
+                    <a:ea typeface="DengXian" panose="02010600030101010101" pitchFamily="2" charset="-122"/>
+                  </a:rPr>
+                  <a:t> access to special funding</a:t>
+                </a:r>
+                <a:endParaRPr lang="en-CN" sz="1600" dirty="0">
+                  <a:solidFill>
+                    <a:schemeClr val="accent1"/>
+                  </a:solidFill>
+                </a:endParaRPr>
+              </a:p>
+            </p:txBody>
+          </p:sp>
+          <p:sp>
+            <p:nvSpPr>
+              <p:cNvPr id="41" name="Rectangle 40">
+                <a:extLst>
+                  <a:ext uri="{FF2B5EF4-FFF2-40B4-BE49-F238E27FC236}">
+                    <a16:creationId xmlns:a16="http://schemas.microsoft.com/office/drawing/2014/main" id="{83A4A1CA-6D8C-B94B-9920-EA2A3CF1056D}"/>
+                  </a:ext>
+                </a:extLst>
+              </p:cNvPr>
+              <p:cNvSpPr/>
+              <p:nvPr/>
+            </p:nvSpPr>
+            <p:spPr>
+              <a:xfrm>
+                <a:off x="4820853" y="3591867"/>
+                <a:ext cx="2550289" cy="646495"/>
+              </a:xfrm>
+              <a:prstGeom prst="rect">
+                <a:avLst/>
+              </a:prstGeom>
+              <a:solidFill>
+                <a:schemeClr val="accent6">
+                  <a:lumMod val="20000"/>
+                  <a:lumOff val="80000"/>
+                </a:schemeClr>
+              </a:solidFill>
+              <a:ln w="19050">
+                <a:solidFill>
+                  <a:schemeClr val="tx1"/>
+                </a:solidFill>
+                <a:prstDash val="dash"/>
+              </a:ln>
+              <a:effectLst>
+                <a:outerShdw blurRad="50800" dist="38100" dir="2700000" algn="tl" rotWithShape="0">
+                  <a:prstClr val="black">
+                    <a:alpha val="40000"/>
+                  </a:prstClr>
+                </a:outerShdw>
+              </a:effectLst>
+            </p:spPr>
+            <p:style>
+              <a:lnRef idx="2">
+                <a:schemeClr val="accent1">
+                  <a:shade val="50000"/>
+                </a:schemeClr>
+              </a:lnRef>
+              <a:fillRef idx="1">
+                <a:schemeClr val="accent1"/>
+              </a:fillRef>
+              <a:effectRef idx="0">
+                <a:schemeClr val="accent1"/>
+              </a:effectRef>
+              <a:fontRef idx="minor">
+                <a:schemeClr val="lt1"/>
+              </a:fontRef>
+            </p:style>
+            <p:txBody>
+              <a:bodyPr rtlCol="0" anchor="ctr"/>
+              <a:lstStyle/>
+              <a:p>
+                <a:pPr algn="ctr"/>
+                <a:r>
+                  <a:rPr lang="en-CN" b="1" dirty="0">
+                    <a:solidFill>
+                      <a:schemeClr val="tx1"/>
+                    </a:solidFill>
+                    <a:latin typeface="Times New Roman" panose="02020603050405020304" pitchFamily="18" charset="0"/>
+                    <a:cs typeface="Times New Roman" panose="02020603050405020304" pitchFamily="18" charset="0"/>
+                  </a:rPr>
+                  <a:t>Stock Market</a:t>
+                </a:r>
+              </a:p>
+            </p:txBody>
+          </p:sp>
+          <p:sp>
+            <p:nvSpPr>
+              <p:cNvPr id="42" name="Down Arrow 41">
+                <a:extLst>
+                  <a:ext uri="{FF2B5EF4-FFF2-40B4-BE49-F238E27FC236}">
+                    <a16:creationId xmlns:a16="http://schemas.microsoft.com/office/drawing/2014/main" id="{B4FC56CB-B9FE-5949-9416-98A56880C371}"/>
+                  </a:ext>
+                </a:extLst>
+              </p:cNvPr>
+              <p:cNvSpPr/>
+              <p:nvPr/>
+            </p:nvSpPr>
+            <p:spPr>
+              <a:xfrm>
+                <a:off x="6841206" y="3297710"/>
+                <a:ext cx="529936" cy="224375"/>
+              </a:xfrm>
+              <a:prstGeom prst="downArrow">
+                <a:avLst/>
+              </a:prstGeom>
+              <a:solidFill>
+                <a:srgbClr val="7030A0"/>
+              </a:solidFill>
+              <a:ln w="19050">
+                <a:solidFill>
+                  <a:schemeClr val="tx1"/>
+                </a:solidFill>
+              </a:ln>
+            </p:spPr>
+            <p:style>
+              <a:lnRef idx="2">
+                <a:schemeClr val="accent1">
+                  <a:shade val="50000"/>
+                </a:schemeClr>
+              </a:lnRef>
+              <a:fillRef idx="1">
+                <a:schemeClr val="accent1"/>
+              </a:fillRef>
+              <a:effectRef idx="0">
+                <a:schemeClr val="accent1"/>
+              </a:effectRef>
+              <a:fontRef idx="minor">
+                <a:schemeClr val="lt1"/>
+              </a:fontRef>
+            </p:style>
+            <p:txBody>
+              <a:bodyPr rtlCol="0" anchor="ctr"/>
+              <a:lstStyle/>
+              <a:p>
+                <a:pPr algn="ctr"/>
+                <a:endParaRPr lang="en-CN"/>
+              </a:p>
+            </p:txBody>
+          </p:sp>
+        </p:grpSp>
+        <p:sp>
+          <p:nvSpPr>
+            <p:cNvPr id="47" name="Rounded Rectangle 46">
+              <a:extLst>
+                <a:ext uri="{FF2B5EF4-FFF2-40B4-BE49-F238E27FC236}">
+                  <a16:creationId xmlns:a16="http://schemas.microsoft.com/office/drawing/2014/main" id="{FAFDE21A-D877-8749-812F-354FFC7E8B8C}"/>
+                </a:ext>
+              </a:extLst>
+            </p:cNvPr>
+            <p:cNvSpPr/>
+            <p:nvPr/>
+          </p:nvSpPr>
+          <p:spPr>
+            <a:xfrm>
+              <a:off x="734288" y="3273332"/>
+              <a:ext cx="10723419" cy="1919862"/>
+            </a:xfrm>
+            <a:prstGeom prst="roundRect">
+              <a:avLst>
+                <a:gd name="adj" fmla="val 2453"/>
+              </a:avLst>
+            </a:prstGeom>
+            <a:noFill/>
+            <a:ln w="19050">
+              <a:solidFill>
+                <a:srgbClr val="C00000"/>
+              </a:solidFill>
+              <a:prstDash val="solid"/>
+            </a:ln>
+            <a:effectLst>
+              <a:outerShdw blurRad="50800" dist="38100" dir="2700000" algn="tl" rotWithShape="0">
+                <a:prstClr val="black">
+                  <a:alpha val="40000"/>
+                </a:prstClr>
+              </a:outerShdw>
+            </a:effectLst>
+          </p:spPr>
+          <p:style>
+            <a:lnRef idx="2">
+              <a:schemeClr val="accent1">
+                <a:shade val="50000"/>
+              </a:schemeClr>
+            </a:lnRef>
+            <a:fillRef idx="1">
+              <a:schemeClr val="accent1"/>
+            </a:fillRef>
+            <a:effectRef idx="0">
+              <a:schemeClr val="accent1"/>
+            </a:effectRef>
+            <a:fontRef idx="minor">
+              <a:schemeClr val="lt1"/>
+            </a:fontRef>
+          </p:style>
+          <p:txBody>
+            <a:bodyPr rtlCol="0" anchor="t"/>
+            <a:lstStyle/>
+            <a:p>
+              <a:endParaRPr lang="en-CN" b="1" i="1" dirty="0">
+                <a:solidFill>
+                  <a:srgbClr val="C00000"/>
+                </a:solidFill>
+                <a:latin typeface="Times New Roman" panose="02020603050405020304" pitchFamily="18" charset="0"/>
+                <a:ea typeface="KaiTi" panose="02010609060101010101" pitchFamily="49" charset="-122"/>
+                <a:cs typeface="Times New Roman" panose="02020603050405020304" pitchFamily="18" charset="0"/>
+              </a:endParaRPr>
+            </a:p>
+          </p:txBody>
+        </p:sp>
+        <p:sp>
+          <p:nvSpPr>
+            <p:cNvPr id="48" name="TextBox 47">
+              <a:extLst>
+                <a:ext uri="{FF2B5EF4-FFF2-40B4-BE49-F238E27FC236}">
+                  <a16:creationId xmlns:a16="http://schemas.microsoft.com/office/drawing/2014/main" id="{0FD21034-51E0-1B43-8E2F-398546A193DA}"/>
+                </a:ext>
+              </a:extLst>
+            </p:cNvPr>
+            <p:cNvSpPr txBox="1"/>
+            <p:nvPr/>
+          </p:nvSpPr>
+          <p:spPr>
+            <a:xfrm>
+              <a:off x="734290" y="4757818"/>
+              <a:ext cx="2648265" cy="435376"/>
+            </a:xfrm>
+            <a:prstGeom prst="rect">
+              <a:avLst/>
+            </a:prstGeom>
+            <a:noFill/>
+          </p:spPr>
+          <p:txBody>
+            <a:bodyPr wrap="square">
+              <a:spAutoFit/>
+            </a:bodyPr>
+            <a:lstStyle/>
+            <a:p>
+              <a:pPr>
+                <a:lnSpc>
+                  <a:spcPct val="120000"/>
+                </a:lnSpc>
+              </a:pPr>
+              <a:r>
+                <a:rPr lang="en-US" sz="2000" b="1" i="1" dirty="0">
+                  <a:solidFill>
+                    <a:srgbClr val="C00000"/>
+                  </a:solidFill>
+                  <a:effectLst/>
+                  <a:latin typeface="Times New Roman" panose="02020603050405020304" pitchFamily="18" charset="0"/>
+                  <a:ea typeface="DengXian" panose="02010600030101010101" pitchFamily="2" charset="-122"/>
+                </a:rPr>
+                <a:t>Policy Effects</a:t>
+              </a:r>
+              <a:endParaRPr lang="en-CN" sz="2000" b="1" i="1" dirty="0">
+                <a:solidFill>
+                  <a:srgbClr val="C00000"/>
+                </a:solidFill>
+              </a:endParaRPr>
+            </a:p>
+          </p:txBody>
+        </p:sp>
+        <p:grpSp>
+          <p:nvGrpSpPr>
+            <p:cNvPr id="54" name="Group 53">
+              <a:extLst>
+                <a:ext uri="{FF2B5EF4-FFF2-40B4-BE49-F238E27FC236}">
+                  <a16:creationId xmlns:a16="http://schemas.microsoft.com/office/drawing/2014/main" id="{613AF38E-39D1-B24F-A72F-1712DE4928F3}"/>
+                </a:ext>
+              </a:extLst>
+            </p:cNvPr>
+            <p:cNvGrpSpPr/>
+            <p:nvPr/>
+          </p:nvGrpSpPr>
+          <p:grpSpPr>
+            <a:xfrm>
+              <a:off x="995420" y="3429000"/>
+              <a:ext cx="10201166" cy="1247028"/>
+              <a:chOff x="995419" y="3577643"/>
+              <a:chExt cx="10201166" cy="1247028"/>
+            </a:xfrm>
+          </p:grpSpPr>
+          <p:sp>
+            <p:nvSpPr>
+              <p:cNvPr id="51" name="Rectangle 50">
+                <a:extLst>
+                  <a:ext uri="{FF2B5EF4-FFF2-40B4-BE49-F238E27FC236}">
+                    <a16:creationId xmlns:a16="http://schemas.microsoft.com/office/drawing/2014/main" id="{65A10AA2-9E82-CC49-AD19-4B874F1317C1}"/>
+                  </a:ext>
+                </a:extLst>
+              </p:cNvPr>
+              <p:cNvSpPr/>
+              <p:nvPr/>
+            </p:nvSpPr>
+            <p:spPr>
+              <a:xfrm>
+                <a:off x="995419" y="3577643"/>
+                <a:ext cx="2550289" cy="1246159"/>
+              </a:xfrm>
+              <a:prstGeom prst="rect">
+                <a:avLst/>
+              </a:prstGeom>
+              <a:solidFill>
+                <a:schemeClr val="bg1">
+                  <a:lumMod val="95000"/>
+                </a:schemeClr>
+              </a:solidFill>
+              <a:ln w="19050">
+                <a:solidFill>
+                  <a:schemeClr val="tx1"/>
+                </a:solidFill>
+                <a:prstDash val="dash"/>
+              </a:ln>
+              <a:effectLst>
+                <a:outerShdw blurRad="50800" dist="38100" dir="2700000" algn="tl" rotWithShape="0">
+                  <a:prstClr val="black">
+                    <a:alpha val="40000"/>
+                  </a:prstClr>
+                </a:outerShdw>
+              </a:effectLst>
+            </p:spPr>
+            <p:style>
+              <a:lnRef idx="2">
+                <a:schemeClr val="accent1">
+                  <a:shade val="50000"/>
+                </a:schemeClr>
+              </a:lnRef>
+              <a:fillRef idx="1">
+                <a:schemeClr val="accent1"/>
+              </a:fillRef>
+              <a:effectRef idx="0">
+                <a:schemeClr val="accent1"/>
+              </a:effectRef>
+              <a:fontRef idx="minor">
+                <a:schemeClr val="lt1"/>
+              </a:fontRef>
+            </p:style>
+            <p:txBody>
+              <a:bodyPr rtlCol="0" anchor="ctr"/>
+              <a:lstStyle/>
+              <a:p>
+                <a:pPr algn="just"/>
+                <a:r>
+                  <a:rPr lang="en-US" dirty="0">
+                    <a:solidFill>
+                      <a:srgbClr val="000000"/>
+                    </a:solidFill>
+                    <a:effectLst/>
+                    <a:latin typeface="Times New Roman" panose="02020603050405020304" pitchFamily="18" charset="0"/>
+                    <a:ea typeface="KaiTi" panose="02010609060101010101" pitchFamily="49" charset="-122"/>
+                  </a:rPr>
+                  <a:t>The </a:t>
+                </a:r>
+                <a:r>
+                  <a:rPr lang="en-US" b="1" dirty="0">
+                    <a:solidFill>
+                      <a:srgbClr val="000000"/>
+                    </a:solidFill>
+                    <a:effectLst/>
+                    <a:latin typeface="Times New Roman" panose="02020603050405020304" pitchFamily="18" charset="0"/>
+                    <a:ea typeface="KaiTi" panose="02010609060101010101" pitchFamily="49" charset="-122"/>
+                  </a:rPr>
+                  <a:t>first product</a:t>
+                </a:r>
+                <a:r>
+                  <a:rPr lang="en-US" dirty="0">
+                    <a:solidFill>
+                      <a:srgbClr val="000000"/>
+                    </a:solidFill>
+                    <a:effectLst/>
+                    <a:latin typeface="Times New Roman" panose="02020603050405020304" pitchFamily="18" charset="0"/>
+                    <a:ea typeface="KaiTi" panose="02010609060101010101" pitchFamily="49" charset="-122"/>
+                  </a:rPr>
+                  <a:t> created by the PBOC specifically for the development of asset capital markets</a:t>
+                </a:r>
+                <a:endParaRPr lang="en-CN" dirty="0"/>
+              </a:p>
+            </p:txBody>
+          </p:sp>
+          <p:sp>
+            <p:nvSpPr>
+              <p:cNvPr id="52" name="Rectangle 51">
+                <a:extLst>
+                  <a:ext uri="{FF2B5EF4-FFF2-40B4-BE49-F238E27FC236}">
+                    <a16:creationId xmlns:a16="http://schemas.microsoft.com/office/drawing/2014/main" id="{2DF79633-D7F7-3C48-993D-754A5C3D9CE4}"/>
+                  </a:ext>
+                </a:extLst>
+              </p:cNvPr>
+              <p:cNvSpPr/>
+              <p:nvPr/>
+            </p:nvSpPr>
+            <p:spPr>
+              <a:xfrm>
+                <a:off x="4022749" y="3578512"/>
+                <a:ext cx="4146504" cy="1246159"/>
+              </a:xfrm>
+              <a:prstGeom prst="rect">
+                <a:avLst/>
+              </a:prstGeom>
+              <a:solidFill>
+                <a:schemeClr val="bg1">
+                  <a:lumMod val="95000"/>
+                </a:schemeClr>
+              </a:solidFill>
+              <a:ln w="19050">
+                <a:solidFill>
+                  <a:schemeClr val="tx1"/>
+                </a:solidFill>
+                <a:prstDash val="dash"/>
+              </a:ln>
+              <a:effectLst>
+                <a:outerShdw blurRad="50800" dist="38100" dir="2700000" algn="tl" rotWithShape="0">
+                  <a:prstClr val="black">
+                    <a:alpha val="40000"/>
+                  </a:prstClr>
+                </a:outerShdw>
+              </a:effectLst>
+            </p:spPr>
+            <p:style>
+              <a:lnRef idx="2">
+                <a:schemeClr val="accent1">
+                  <a:shade val="50000"/>
+                </a:schemeClr>
+              </a:lnRef>
+              <a:fillRef idx="1">
+                <a:schemeClr val="accent1"/>
+              </a:fillRef>
+              <a:effectRef idx="0">
+                <a:schemeClr val="accent1"/>
+              </a:effectRef>
+              <a:fontRef idx="minor">
+                <a:schemeClr val="lt1"/>
+              </a:fontRef>
+            </p:style>
+            <p:txBody>
+              <a:bodyPr rtlCol="0" anchor="ctr"/>
+              <a:lstStyle/>
+              <a:p>
+                <a:pPr algn="just"/>
+                <a:r>
+                  <a:rPr lang="en-US" dirty="0">
+                    <a:solidFill>
+                      <a:srgbClr val="000000"/>
+                    </a:solidFill>
+                    <a:latin typeface="Times New Roman" panose="02020603050405020304" pitchFamily="18" charset="0"/>
+                    <a:ea typeface="KaiTi" panose="02010609060101010101" pitchFamily="49" charset="-122"/>
+                  </a:rPr>
+                  <a:t>T</a:t>
+                </a:r>
+                <a:r>
+                  <a:rPr lang="en-US" sz="1800" dirty="0">
+                    <a:solidFill>
+                      <a:srgbClr val="000000"/>
+                    </a:solidFill>
+                    <a:effectLst/>
+                    <a:latin typeface="Times New Roman" panose="02020603050405020304" pitchFamily="18" charset="0"/>
+                    <a:ea typeface="KaiTi" panose="02010609060101010101" pitchFamily="49" charset="-122"/>
+                  </a:rPr>
+                  <a:t>he rapid implementation of SFISF shows positive signals, which is </a:t>
+                </a:r>
+                <a:r>
+                  <a:rPr lang="en-US" sz="1800" b="1" dirty="0">
+                    <a:solidFill>
+                      <a:srgbClr val="000000"/>
+                    </a:solidFill>
+                    <a:effectLst/>
+                    <a:latin typeface="Times New Roman" panose="02020603050405020304" pitchFamily="18" charset="0"/>
+                    <a:ea typeface="KaiTi" panose="02010609060101010101" pitchFamily="49" charset="-122"/>
+                  </a:rPr>
+                  <a:t>very helpful to boost the confidence </a:t>
+                </a:r>
+                <a:r>
+                  <a:rPr lang="en-US" sz="1800" dirty="0">
+                    <a:solidFill>
+                      <a:srgbClr val="000000"/>
+                    </a:solidFill>
+                    <a:effectLst/>
+                    <a:latin typeface="Times New Roman" panose="02020603050405020304" pitchFamily="18" charset="0"/>
+                    <a:ea typeface="KaiTi" panose="02010609060101010101" pitchFamily="49" charset="-122"/>
+                  </a:rPr>
+                  <a:t>of the capital market</a:t>
+                </a:r>
+                <a:r>
+                  <a:rPr lang="en-CN" dirty="0">
+                    <a:effectLst/>
+                  </a:rPr>
+                  <a:t> </a:t>
+                </a:r>
+                <a:endParaRPr lang="en-CN" dirty="0"/>
+              </a:p>
+            </p:txBody>
+          </p:sp>
+          <p:sp>
+            <p:nvSpPr>
+              <p:cNvPr id="53" name="Rectangle 52">
+                <a:extLst>
+                  <a:ext uri="{FF2B5EF4-FFF2-40B4-BE49-F238E27FC236}">
+                    <a16:creationId xmlns:a16="http://schemas.microsoft.com/office/drawing/2014/main" id="{5D75A62D-E61D-3142-BD9C-6798928CFC9C}"/>
+                  </a:ext>
+                </a:extLst>
+              </p:cNvPr>
+              <p:cNvSpPr/>
+              <p:nvPr/>
+            </p:nvSpPr>
+            <p:spPr>
+              <a:xfrm>
+                <a:off x="8646293" y="3578512"/>
+                <a:ext cx="2550292" cy="1246159"/>
+              </a:xfrm>
+              <a:prstGeom prst="rect">
+                <a:avLst/>
+              </a:prstGeom>
+              <a:solidFill>
+                <a:schemeClr val="bg1">
+                  <a:lumMod val="95000"/>
+                </a:schemeClr>
+              </a:solidFill>
+              <a:ln w="19050">
+                <a:solidFill>
+                  <a:schemeClr val="tx1"/>
+                </a:solidFill>
+                <a:prstDash val="dash"/>
+              </a:ln>
+              <a:effectLst>
+                <a:outerShdw blurRad="50800" dist="38100" dir="2700000" algn="tl" rotWithShape="0">
+                  <a:prstClr val="black">
+                    <a:alpha val="40000"/>
+                  </a:prstClr>
+                </a:outerShdw>
+              </a:effectLst>
+            </p:spPr>
+            <p:style>
+              <a:lnRef idx="2">
+                <a:schemeClr val="accent1">
+                  <a:shade val="50000"/>
+                </a:schemeClr>
+              </a:lnRef>
+              <a:fillRef idx="1">
+                <a:schemeClr val="accent1"/>
+              </a:fillRef>
+              <a:effectRef idx="0">
+                <a:schemeClr val="accent1"/>
+              </a:effectRef>
+              <a:fontRef idx="minor">
+                <a:schemeClr val="lt1"/>
+              </a:fontRef>
+            </p:style>
+            <p:txBody>
+              <a:bodyPr rtlCol="0" anchor="ctr"/>
+              <a:lstStyle/>
+              <a:p>
+                <a:pPr algn="just"/>
+                <a:r>
+                  <a:rPr lang="en-US" dirty="0">
+                    <a:solidFill>
+                      <a:srgbClr val="000000"/>
+                    </a:solidFill>
+                    <a:latin typeface="Times New Roman" panose="02020603050405020304" pitchFamily="18" charset="0"/>
+                    <a:ea typeface="KaiTi" panose="02010609060101010101" pitchFamily="49" charset="-122"/>
+                  </a:rPr>
+                  <a:t>C</a:t>
+                </a:r>
+                <a:r>
+                  <a:rPr lang="en-US" sz="1800" dirty="0">
+                    <a:solidFill>
+                      <a:srgbClr val="000000"/>
+                    </a:solidFill>
+                    <a:effectLst/>
+                    <a:latin typeface="Times New Roman" panose="02020603050405020304" pitchFamily="18" charset="0"/>
+                    <a:ea typeface="KaiTi" panose="02010609060101010101" pitchFamily="49" charset="-122"/>
+                  </a:rPr>
+                  <a:t>onsolidating the bottom area of the capital market</a:t>
+                </a:r>
+                <a:r>
+                  <a:rPr lang="en-CN" dirty="0">
+                    <a:effectLst/>
+                  </a:rPr>
+                  <a:t> </a:t>
+                </a:r>
+                <a:r>
+                  <a:rPr lang="en-US" sz="1800" dirty="0">
+                    <a:solidFill>
+                      <a:srgbClr val="000000"/>
+                    </a:solidFill>
+                    <a:effectLst/>
+                    <a:latin typeface="Times New Roman" panose="02020603050405020304" pitchFamily="18" charset="0"/>
+                    <a:ea typeface="KaiTi" panose="02010609060101010101" pitchFamily="49" charset="-122"/>
+                  </a:rPr>
+                  <a:t>since 9.24</a:t>
+                </a:r>
+                <a:r>
+                  <a:rPr lang="en-CN" dirty="0">
+                    <a:effectLst/>
+                  </a:rPr>
+                  <a:t> </a:t>
+                </a:r>
+                <a:endParaRPr lang="en-CN" dirty="0"/>
+              </a:p>
+            </p:txBody>
+          </p:sp>
+        </p:grpSp>
+      </p:grpSp>
+    </p:spTree>
+    <p:extLst>
+      <p:ext uri="{BB962C8B-B14F-4D97-AF65-F5344CB8AC3E}">
+        <p14:creationId xmlns:p14="http://schemas.microsoft.com/office/powerpoint/2010/main" val="252385616"/>
+      </p:ext>
+    </p:extLst>
+  </p:cSld>
+  <p:clrMapOvr>
+    <a:masterClrMapping/>
+  </p:clrMapOvr>
+</p:sld>
+</file>
+
+<file path=ppt/slides/slide4.xml><?xml version="1.0" encoding="utf-8"?>
+<p:sld xmlns:a="http://schemas.openxmlformats.org/drawingml/2006/main" xmlns:r="http://schemas.openxmlformats.org/officeDocument/2006/relationships" xmlns:p="http://schemas.openxmlformats.org/presentationml/2006/main">
+  <p:cSld>
+    <p:spTree>
+      <p:nvGrpSpPr>
+        <p:cNvPr id="1" name=""/>
+        <p:cNvGrpSpPr/>
+        <p:nvPr/>
+      </p:nvGrpSpPr>
+      <p:grpSpPr>
+        <a:xfrm>
+          <a:off x="0" y="0"/>
+          <a:ext cx="0" cy="0"/>
+          <a:chOff x="0" y="0"/>
+          <a:chExt cx="0" cy="0"/>
+        </a:xfrm>
+      </p:grpSpPr>
       <p:pic>
         <p:nvPicPr>
-          <p:cNvPr id="2" name="Picture 1">
-            <a:extLst>
-              <a:ext uri="{FF2B5EF4-FFF2-40B4-BE49-F238E27FC236}">
-                <a16:creationId xmlns:a16="http://schemas.microsoft.com/office/drawing/2014/main" id="{BD7E4DD0-22B7-D945-8AEE-338425A1C98F}"/>
+          <p:cNvPr id="9" name="Picture 8">
+            <a:extLst>
+              <a:ext uri="{FF2B5EF4-FFF2-40B4-BE49-F238E27FC236}">
+                <a16:creationId xmlns:a16="http://schemas.microsoft.com/office/drawing/2014/main" id="{C411F158-1A5F-E443-961C-266287E55A77}"/>
               </a:ext>
             </a:extLst>
           </p:cNvPr>
@@ -4462,56 +7514,1099 @@
           </p:cNvPicPr>
           <p:nvPr/>
         </p:nvPicPr>
-        <p:blipFill>
+        <p:blipFill rotWithShape="1">
           <a:blip r:embed="rId2"/>
-          <a:stretch>
-            <a:fillRect/>
-          </a:stretch>
+          <a:srcRect t="7898" b="5135"/>
+          <a:stretch/>
         </p:blipFill>
         <p:spPr>
           <a:xfrm>
-            <a:off x="1187450" y="326390"/>
-            <a:ext cx="9817100" cy="2959100"/>
+            <a:off x="0" y="446901"/>
+            <a:ext cx="12192000" cy="5964197"/>
           </a:xfrm>
           <a:prstGeom prst="rect">
             <a:avLst/>
           </a:prstGeom>
         </p:spPr>
       </p:pic>
-      <p:pic>
-        <p:nvPicPr>
-          <p:cNvPr id="3" name="Picture 2">
-            <a:extLst>
-              <a:ext uri="{FF2B5EF4-FFF2-40B4-BE49-F238E27FC236}">
-                <a16:creationId xmlns:a16="http://schemas.microsoft.com/office/drawing/2014/main" id="{43A73E7F-DA8D-774C-850D-67872A0A95CF}"/>
-              </a:ext>
-            </a:extLst>
-          </p:cNvPr>
-          <p:cNvPicPr>
-            <a:picLocks noChangeAspect="1"/>
-          </p:cNvPicPr>
+      <p:sp>
+        <p:nvSpPr>
+          <p:cNvPr id="49" name="Rectangle 48">
+            <a:extLst>
+              <a:ext uri="{FF2B5EF4-FFF2-40B4-BE49-F238E27FC236}">
+                <a16:creationId xmlns:a16="http://schemas.microsoft.com/office/drawing/2014/main" id="{37A022B8-951C-8C4A-8D4D-5E69ECA877A4}"/>
+              </a:ext>
+            </a:extLst>
+          </p:cNvPr>
+          <p:cNvSpPr/>
           <p:nvPr/>
-        </p:nvPicPr>
-        <p:blipFill>
-          <a:blip r:embed="rId3"/>
-          <a:stretch>
-            <a:fillRect/>
-          </a:stretch>
-        </p:blipFill>
+        </p:nvSpPr>
         <p:spPr>
           <a:xfrm>
-            <a:off x="2181225" y="2230033"/>
-            <a:ext cx="7829550" cy="4301577"/>
+            <a:off x="8379146" y="885523"/>
+            <a:ext cx="3190122" cy="5014761"/>
           </a:xfrm>
           <a:prstGeom prst="rect">
             <a:avLst/>
           </a:prstGeom>
+          <a:solidFill>
+            <a:schemeClr val="accent5">
+              <a:lumMod val="20000"/>
+              <a:lumOff val="80000"/>
+              <a:alpha val="50000"/>
+            </a:schemeClr>
+          </a:solidFill>
+          <a:ln>
+            <a:noFill/>
+          </a:ln>
         </p:spPr>
-      </p:pic>
+        <p:style>
+          <a:lnRef idx="2">
+            <a:schemeClr val="accent1">
+              <a:shade val="50000"/>
+            </a:schemeClr>
+          </a:lnRef>
+          <a:fillRef idx="1">
+            <a:schemeClr val="accent1"/>
+          </a:fillRef>
+          <a:effectRef idx="0">
+            <a:schemeClr val="accent1"/>
+          </a:effectRef>
+          <a:fontRef idx="minor">
+            <a:schemeClr val="lt1"/>
+          </a:fontRef>
+        </p:style>
+        <p:txBody>
+          <a:bodyPr rtlCol="0" anchor="ctr"/>
+          <a:lstStyle/>
+          <a:p>
+            <a:pPr algn="ctr"/>
+            <a:endParaRPr lang="en-CN" dirty="0">
+              <a:solidFill>
+                <a:schemeClr val="accent3">
+                  <a:lumMod val="20000"/>
+                  <a:lumOff val="80000"/>
+                </a:schemeClr>
+              </a:solidFill>
+            </a:endParaRPr>
+          </a:p>
+        </p:txBody>
+      </p:sp>
+      <p:sp>
+        <p:nvSpPr>
+          <p:cNvPr id="48" name="Rectangle 47">
+            <a:extLst>
+              <a:ext uri="{FF2B5EF4-FFF2-40B4-BE49-F238E27FC236}">
+                <a16:creationId xmlns:a16="http://schemas.microsoft.com/office/drawing/2014/main" id="{D6056247-6B0B-0B40-BAC9-660C12376F0A}"/>
+              </a:ext>
+            </a:extLst>
+          </p:cNvPr>
+          <p:cNvSpPr/>
+          <p:nvPr/>
+        </p:nvSpPr>
+        <p:spPr>
+          <a:xfrm>
+            <a:off x="3724977" y="885524"/>
+            <a:ext cx="4517265" cy="5014761"/>
+          </a:xfrm>
+          <a:prstGeom prst="rect">
+            <a:avLst/>
+          </a:prstGeom>
+          <a:solidFill>
+            <a:schemeClr val="tx2">
+              <a:alpha val="50000"/>
+            </a:schemeClr>
+          </a:solidFill>
+          <a:ln>
+            <a:noFill/>
+          </a:ln>
+        </p:spPr>
+        <p:style>
+          <a:lnRef idx="2">
+            <a:schemeClr val="accent1">
+              <a:shade val="50000"/>
+            </a:schemeClr>
+          </a:lnRef>
+          <a:fillRef idx="1">
+            <a:schemeClr val="accent1"/>
+          </a:fillRef>
+          <a:effectRef idx="0">
+            <a:schemeClr val="accent1"/>
+          </a:effectRef>
+          <a:fontRef idx="minor">
+            <a:schemeClr val="lt1"/>
+          </a:fontRef>
+        </p:style>
+        <p:txBody>
+          <a:bodyPr rtlCol="0" anchor="ctr"/>
+          <a:lstStyle/>
+          <a:p>
+            <a:pPr algn="ctr"/>
+            <a:endParaRPr lang="en-CN" dirty="0">
+              <a:solidFill>
+                <a:schemeClr val="accent3">
+                  <a:lumMod val="20000"/>
+                  <a:lumOff val="80000"/>
+                </a:schemeClr>
+              </a:solidFill>
+            </a:endParaRPr>
+          </a:p>
+        </p:txBody>
+      </p:sp>
+      <p:sp>
+        <p:nvSpPr>
+          <p:cNvPr id="47" name="Rectangle 46">
+            <a:extLst>
+              <a:ext uri="{FF2B5EF4-FFF2-40B4-BE49-F238E27FC236}">
+                <a16:creationId xmlns:a16="http://schemas.microsoft.com/office/drawing/2014/main" id="{71E81B86-C998-444B-9B64-6C0664E81050}"/>
+              </a:ext>
+            </a:extLst>
+          </p:cNvPr>
+          <p:cNvSpPr/>
+          <p:nvPr/>
+        </p:nvSpPr>
+        <p:spPr>
+          <a:xfrm>
+            <a:off x="182880" y="885524"/>
+            <a:ext cx="3450449" cy="5014761"/>
+          </a:xfrm>
+          <a:prstGeom prst="rect">
+            <a:avLst/>
+          </a:prstGeom>
+          <a:solidFill>
+            <a:schemeClr val="bg1">
+              <a:alpha val="50000"/>
+            </a:schemeClr>
+          </a:solidFill>
+          <a:ln>
+            <a:noFill/>
+          </a:ln>
+        </p:spPr>
+        <p:style>
+          <a:lnRef idx="2">
+            <a:schemeClr val="accent1">
+              <a:shade val="50000"/>
+            </a:schemeClr>
+          </a:lnRef>
+          <a:fillRef idx="1">
+            <a:schemeClr val="accent1"/>
+          </a:fillRef>
+          <a:effectRef idx="0">
+            <a:schemeClr val="accent1"/>
+          </a:effectRef>
+          <a:fontRef idx="minor">
+            <a:schemeClr val="lt1"/>
+          </a:fontRef>
+        </p:style>
+        <p:txBody>
+          <a:bodyPr rtlCol="0" anchor="ctr"/>
+          <a:lstStyle/>
+          <a:p>
+            <a:pPr algn="ctr"/>
+            <a:endParaRPr lang="en-CN"/>
+          </a:p>
+        </p:txBody>
+      </p:sp>
+      <p:sp>
+        <p:nvSpPr>
+          <p:cNvPr id="16" name="Oval 15">
+            <a:extLst>
+              <a:ext uri="{FF2B5EF4-FFF2-40B4-BE49-F238E27FC236}">
+                <a16:creationId xmlns:a16="http://schemas.microsoft.com/office/drawing/2014/main" id="{76EDE888-E9C9-A84A-B9FB-316F59F32E32}"/>
+              </a:ext>
+            </a:extLst>
+          </p:cNvPr>
+          <p:cNvSpPr/>
+          <p:nvPr/>
+        </p:nvSpPr>
+        <p:spPr>
+          <a:xfrm>
+            <a:off x="3861881" y="4830618"/>
+            <a:ext cx="379919" cy="820882"/>
+          </a:xfrm>
+          <a:prstGeom prst="ellipse">
+            <a:avLst/>
+          </a:prstGeom>
+          <a:noFill/>
+          <a:ln w="19050">
+            <a:solidFill>
+              <a:schemeClr val="bg1"/>
+            </a:solidFill>
+          </a:ln>
+        </p:spPr>
+        <p:style>
+          <a:lnRef idx="2">
+            <a:schemeClr val="accent1">
+              <a:shade val="50000"/>
+            </a:schemeClr>
+          </a:lnRef>
+          <a:fillRef idx="1">
+            <a:schemeClr val="accent1"/>
+          </a:fillRef>
+          <a:effectRef idx="0">
+            <a:schemeClr val="accent1"/>
+          </a:effectRef>
+          <a:fontRef idx="minor">
+            <a:schemeClr val="lt1"/>
+          </a:fontRef>
+        </p:style>
+        <p:txBody>
+          <a:bodyPr rtlCol="0" anchor="ctr"/>
+          <a:lstStyle/>
+          <a:p>
+            <a:pPr algn="ctr"/>
+            <a:endParaRPr lang="en-CN"/>
+          </a:p>
+        </p:txBody>
+      </p:sp>
+      <p:sp>
+        <p:nvSpPr>
+          <p:cNvPr id="19" name="TextBox 18">
+            <a:extLst>
+              <a:ext uri="{FF2B5EF4-FFF2-40B4-BE49-F238E27FC236}">
+                <a16:creationId xmlns:a16="http://schemas.microsoft.com/office/drawing/2014/main" id="{2A7E1B47-E7AC-0343-95FC-6EA3BB4FFF1D}"/>
+              </a:ext>
+            </a:extLst>
+          </p:cNvPr>
+          <p:cNvSpPr txBox="1"/>
+          <p:nvPr/>
+        </p:nvSpPr>
+        <p:spPr>
+          <a:xfrm>
+            <a:off x="4320343" y="4871727"/>
+            <a:ext cx="2033872" cy="738664"/>
+          </a:xfrm>
+          <a:prstGeom prst="rect">
+            <a:avLst/>
+          </a:prstGeom>
+          <a:noFill/>
+        </p:spPr>
+        <p:txBody>
+          <a:bodyPr wrap="square" rtlCol="0">
+            <a:spAutoFit/>
+          </a:bodyPr>
+          <a:lstStyle/>
+          <a:p>
+            <a:pPr algn="ctr"/>
+            <a:r>
+              <a:rPr lang="en-US" altLang="zh-CN" sz="1400" b="1" dirty="0">
+                <a:solidFill>
+                  <a:schemeClr val="bg1"/>
+                </a:solidFill>
+                <a:latin typeface="Times New Roman" panose="02020603050405020304" pitchFamily="18" charset="0"/>
+                <a:cs typeface="Times New Roman" panose="02020603050405020304" pitchFamily="18" charset="0"/>
+              </a:rPr>
+              <a:t>9.24</a:t>
+            </a:r>
+            <a:r>
+              <a:rPr lang="zh-CN" altLang="en-US" sz="1400" b="1" dirty="0">
+                <a:solidFill>
+                  <a:schemeClr val="bg1"/>
+                </a:solidFill>
+                <a:latin typeface="Times New Roman" panose="02020603050405020304" pitchFamily="18" charset="0"/>
+                <a:cs typeface="Times New Roman" panose="02020603050405020304" pitchFamily="18" charset="0"/>
+              </a:rPr>
+              <a:t> </a:t>
+            </a:r>
+            <a:r>
+              <a:rPr lang="en-US" altLang="zh-CN" sz="1400" b="1" dirty="0">
+                <a:solidFill>
+                  <a:schemeClr val="bg1"/>
+                </a:solidFill>
+                <a:latin typeface="Times New Roman" panose="02020603050405020304" pitchFamily="18" charset="0"/>
+                <a:cs typeface="Times New Roman" panose="02020603050405020304" pitchFamily="18" charset="0"/>
+              </a:rPr>
+              <a:t>Announcing Monetary </a:t>
+            </a:r>
+          </a:p>
+          <a:p>
+            <a:pPr algn="ctr"/>
+            <a:r>
+              <a:rPr lang="en-US" altLang="zh-CN" sz="1400" b="1" dirty="0">
+                <a:solidFill>
+                  <a:schemeClr val="bg1"/>
+                </a:solidFill>
+                <a:latin typeface="Times New Roman" panose="02020603050405020304" pitchFamily="18" charset="0"/>
+                <a:cs typeface="Times New Roman" panose="02020603050405020304" pitchFamily="18" charset="0"/>
+              </a:rPr>
+              <a:t>Easing Package </a:t>
+            </a:r>
+            <a:endParaRPr lang="en-CN" sz="1400" b="1" dirty="0">
+              <a:solidFill>
+                <a:schemeClr val="bg1"/>
+              </a:solidFill>
+              <a:latin typeface="Times New Roman" panose="02020603050405020304" pitchFamily="18" charset="0"/>
+              <a:cs typeface="Times New Roman" panose="02020603050405020304" pitchFamily="18" charset="0"/>
+            </a:endParaRPr>
+          </a:p>
+        </p:txBody>
+      </p:sp>
+      <p:sp>
+        <p:nvSpPr>
+          <p:cNvPr id="20" name="Oval 19">
+            <a:extLst>
+              <a:ext uri="{FF2B5EF4-FFF2-40B4-BE49-F238E27FC236}">
+                <a16:creationId xmlns:a16="http://schemas.microsoft.com/office/drawing/2014/main" id="{9B19066C-D05E-DC43-ADC7-582E559AB956}"/>
+              </a:ext>
+            </a:extLst>
+          </p:cNvPr>
+          <p:cNvSpPr/>
+          <p:nvPr/>
+        </p:nvSpPr>
+        <p:spPr>
+          <a:xfrm>
+            <a:off x="5044185" y="2634450"/>
+            <a:ext cx="379919" cy="523220"/>
+          </a:xfrm>
+          <a:prstGeom prst="ellipse">
+            <a:avLst/>
+          </a:prstGeom>
+          <a:noFill/>
+          <a:ln w="19050">
+            <a:solidFill>
+              <a:schemeClr val="bg1"/>
+            </a:solidFill>
+          </a:ln>
+        </p:spPr>
+        <p:style>
+          <a:lnRef idx="2">
+            <a:schemeClr val="accent1">
+              <a:shade val="50000"/>
+            </a:schemeClr>
+          </a:lnRef>
+          <a:fillRef idx="1">
+            <a:schemeClr val="accent1"/>
+          </a:fillRef>
+          <a:effectRef idx="0">
+            <a:schemeClr val="accent1"/>
+          </a:effectRef>
+          <a:fontRef idx="minor">
+            <a:schemeClr val="lt1"/>
+          </a:fontRef>
+        </p:style>
+        <p:txBody>
+          <a:bodyPr rtlCol="0" anchor="ctr"/>
+          <a:lstStyle/>
+          <a:p>
+            <a:pPr algn="ctr"/>
+            <a:endParaRPr lang="en-CN"/>
+          </a:p>
+        </p:txBody>
+      </p:sp>
+      <p:sp>
+        <p:nvSpPr>
+          <p:cNvPr id="21" name="TextBox 20">
+            <a:extLst>
+              <a:ext uri="{FF2B5EF4-FFF2-40B4-BE49-F238E27FC236}">
+                <a16:creationId xmlns:a16="http://schemas.microsoft.com/office/drawing/2014/main" id="{F5C0B69B-A6FF-3C4E-93A6-9148612633F7}"/>
+              </a:ext>
+            </a:extLst>
+          </p:cNvPr>
+          <p:cNvSpPr txBox="1"/>
+          <p:nvPr/>
+        </p:nvSpPr>
+        <p:spPr>
+          <a:xfrm>
+            <a:off x="4965063" y="1299983"/>
+            <a:ext cx="2033873" cy="307777"/>
+          </a:xfrm>
+          <a:prstGeom prst="rect">
+            <a:avLst/>
+          </a:prstGeom>
+          <a:noFill/>
+        </p:spPr>
+        <p:txBody>
+          <a:bodyPr wrap="square" rtlCol="0">
+            <a:spAutoFit/>
+          </a:bodyPr>
+          <a:lstStyle/>
+          <a:p>
+            <a:pPr algn="ctr"/>
+            <a:r>
+              <a:rPr lang="en-US" altLang="zh-CN" sz="1400" b="1" dirty="0">
+                <a:solidFill>
+                  <a:schemeClr val="bg1"/>
+                </a:solidFill>
+                <a:latin typeface="Times New Roman" panose="02020603050405020304" pitchFamily="18" charset="0"/>
+                <a:cs typeface="Times New Roman" panose="02020603050405020304" pitchFamily="18" charset="0"/>
+              </a:rPr>
+              <a:t>10.10</a:t>
+            </a:r>
+            <a:r>
+              <a:rPr lang="zh-CN" altLang="en-US" sz="1400" b="1" dirty="0">
+                <a:solidFill>
+                  <a:schemeClr val="bg1"/>
+                </a:solidFill>
+                <a:latin typeface="Times New Roman" panose="02020603050405020304" pitchFamily="18" charset="0"/>
+                <a:cs typeface="Times New Roman" panose="02020603050405020304" pitchFamily="18" charset="0"/>
+              </a:rPr>
+              <a:t> </a:t>
+            </a:r>
+            <a:r>
+              <a:rPr lang="en-US" sz="1400" b="1" dirty="0">
+                <a:solidFill>
+                  <a:schemeClr val="bg1"/>
+                </a:solidFill>
+                <a:effectLst/>
+                <a:latin typeface="Times New Roman" panose="02020603050405020304" pitchFamily="18" charset="0"/>
+                <a:ea typeface="KaiTi" panose="02010609060101010101" pitchFamily="49" charset="-122"/>
+              </a:rPr>
+              <a:t>Creation of SFISF</a:t>
+            </a:r>
+            <a:r>
+              <a:rPr lang="en-CN" sz="1400" b="1" dirty="0">
+                <a:solidFill>
+                  <a:schemeClr val="bg1"/>
+                </a:solidFill>
+                <a:effectLst/>
+              </a:rPr>
+              <a:t> </a:t>
+            </a:r>
+            <a:endParaRPr lang="en-CN" sz="1400" b="1" dirty="0">
+              <a:solidFill>
+                <a:schemeClr val="bg1"/>
+              </a:solidFill>
+              <a:latin typeface="Times New Roman" panose="02020603050405020304" pitchFamily="18" charset="0"/>
+              <a:cs typeface="Times New Roman" panose="02020603050405020304" pitchFamily="18" charset="0"/>
+            </a:endParaRPr>
+          </a:p>
+        </p:txBody>
+      </p:sp>
+      <p:cxnSp>
+        <p:nvCxnSpPr>
+          <p:cNvPr id="26" name="Straight Arrow Connector 25">
+            <a:extLst>
+              <a:ext uri="{FF2B5EF4-FFF2-40B4-BE49-F238E27FC236}">
+                <a16:creationId xmlns:a16="http://schemas.microsoft.com/office/drawing/2014/main" id="{865127C7-A23A-6B4F-8396-08824E9F6927}"/>
+              </a:ext>
+            </a:extLst>
+          </p:cNvPr>
+          <p:cNvCxnSpPr>
+            <a:stCxn id="16" idx="6"/>
+          </p:cNvCxnSpPr>
+          <p:nvPr/>
+        </p:nvCxnSpPr>
+        <p:spPr>
+          <a:xfrm>
+            <a:off x="4241800" y="5241059"/>
+            <a:ext cx="128069" cy="0"/>
+          </a:xfrm>
+          <a:prstGeom prst="straightConnector1">
+            <a:avLst/>
+          </a:prstGeom>
+          <a:ln w="12700">
+            <a:solidFill>
+              <a:schemeClr val="bg1"/>
+            </a:solidFill>
+            <a:tailEnd type="stealth"/>
+          </a:ln>
+        </p:spPr>
+        <p:style>
+          <a:lnRef idx="1">
+            <a:schemeClr val="accent1"/>
+          </a:lnRef>
+          <a:fillRef idx="0">
+            <a:schemeClr val="accent1"/>
+          </a:fillRef>
+          <a:effectRef idx="0">
+            <a:schemeClr val="accent1"/>
+          </a:effectRef>
+          <a:fontRef idx="minor">
+            <a:schemeClr val="tx1"/>
+          </a:fontRef>
+        </p:style>
+      </p:cxnSp>
+      <p:cxnSp>
+        <p:nvCxnSpPr>
+          <p:cNvPr id="27" name="Straight Arrow Connector 26">
+            <a:extLst>
+              <a:ext uri="{FF2B5EF4-FFF2-40B4-BE49-F238E27FC236}">
+                <a16:creationId xmlns:a16="http://schemas.microsoft.com/office/drawing/2014/main" id="{94D4BC7A-77C9-B74C-988E-DF9AB244393B}"/>
+              </a:ext>
+            </a:extLst>
+          </p:cNvPr>
+          <p:cNvCxnSpPr>
+            <a:cxnSpLocks/>
+            <a:stCxn id="20" idx="0"/>
+          </p:cNvCxnSpPr>
+          <p:nvPr/>
+        </p:nvCxnSpPr>
+        <p:spPr>
+          <a:xfrm flipV="1">
+            <a:off x="5234145" y="1550102"/>
+            <a:ext cx="329400" cy="1084348"/>
+          </a:xfrm>
+          <a:prstGeom prst="straightConnector1">
+            <a:avLst/>
+          </a:prstGeom>
+          <a:ln w="12700">
+            <a:solidFill>
+              <a:schemeClr val="bg1"/>
+            </a:solidFill>
+            <a:tailEnd type="stealth"/>
+          </a:ln>
+        </p:spPr>
+        <p:style>
+          <a:lnRef idx="1">
+            <a:schemeClr val="accent1"/>
+          </a:lnRef>
+          <a:fillRef idx="0">
+            <a:schemeClr val="accent1"/>
+          </a:fillRef>
+          <a:effectRef idx="0">
+            <a:schemeClr val="accent1"/>
+          </a:effectRef>
+          <a:fontRef idx="minor">
+            <a:schemeClr val="tx1"/>
+          </a:fontRef>
+        </p:style>
+      </p:cxnSp>
+      <p:sp>
+        <p:nvSpPr>
+          <p:cNvPr id="33" name="Oval 32">
+            <a:extLst>
+              <a:ext uri="{FF2B5EF4-FFF2-40B4-BE49-F238E27FC236}">
+                <a16:creationId xmlns:a16="http://schemas.microsoft.com/office/drawing/2014/main" id="{E6EE198A-F937-7F4C-8000-44EF3279745B}"/>
+              </a:ext>
+            </a:extLst>
+          </p:cNvPr>
+          <p:cNvSpPr/>
+          <p:nvPr/>
+        </p:nvSpPr>
+        <p:spPr>
+          <a:xfrm>
+            <a:off x="6051495" y="2905779"/>
+            <a:ext cx="379919" cy="738664"/>
+          </a:xfrm>
+          <a:prstGeom prst="ellipse">
+            <a:avLst/>
+          </a:prstGeom>
+          <a:noFill/>
+          <a:ln w="19050">
+            <a:solidFill>
+              <a:schemeClr val="bg1"/>
+            </a:solidFill>
+          </a:ln>
+        </p:spPr>
+        <p:style>
+          <a:lnRef idx="2">
+            <a:schemeClr val="accent1">
+              <a:shade val="50000"/>
+            </a:schemeClr>
+          </a:lnRef>
+          <a:fillRef idx="1">
+            <a:schemeClr val="accent1"/>
+          </a:fillRef>
+          <a:effectRef idx="0">
+            <a:schemeClr val="accent1"/>
+          </a:effectRef>
+          <a:fontRef idx="minor">
+            <a:schemeClr val="lt1"/>
+          </a:fontRef>
+        </p:style>
+        <p:txBody>
+          <a:bodyPr rtlCol="0" anchor="ctr"/>
+          <a:lstStyle/>
+          <a:p>
+            <a:pPr algn="ctr"/>
+            <a:endParaRPr lang="en-CN"/>
+          </a:p>
+        </p:txBody>
+      </p:sp>
+      <p:sp>
+        <p:nvSpPr>
+          <p:cNvPr id="34" name="TextBox 33">
+            <a:extLst>
+              <a:ext uri="{FF2B5EF4-FFF2-40B4-BE49-F238E27FC236}">
+                <a16:creationId xmlns:a16="http://schemas.microsoft.com/office/drawing/2014/main" id="{CBAEE18E-BF96-674C-91E0-0659FA6CC1BA}"/>
+              </a:ext>
+            </a:extLst>
+          </p:cNvPr>
+          <p:cNvSpPr txBox="1"/>
+          <p:nvPr/>
+        </p:nvSpPr>
+        <p:spPr>
+          <a:xfrm>
+            <a:off x="6251080" y="3701664"/>
+            <a:ext cx="2033873" cy="307777"/>
+          </a:xfrm>
+          <a:prstGeom prst="rect">
+            <a:avLst/>
+          </a:prstGeom>
+          <a:noFill/>
+        </p:spPr>
+        <p:txBody>
+          <a:bodyPr wrap="square" rtlCol="0">
+            <a:spAutoFit/>
+          </a:bodyPr>
+          <a:lstStyle/>
+          <a:p>
+            <a:pPr algn="ctr"/>
+            <a:r>
+              <a:rPr lang="en-US" altLang="zh-CN" sz="1400" b="1" dirty="0">
+                <a:solidFill>
+                  <a:schemeClr val="bg1"/>
+                </a:solidFill>
+                <a:latin typeface="Times New Roman" panose="02020603050405020304" pitchFamily="18" charset="0"/>
+                <a:cs typeface="Times New Roman" panose="02020603050405020304" pitchFamily="18" charset="0"/>
+              </a:rPr>
+              <a:t>10.18</a:t>
+            </a:r>
+            <a:r>
+              <a:rPr lang="zh-CN" altLang="en-US" sz="1400" b="1" dirty="0">
+                <a:solidFill>
+                  <a:schemeClr val="bg1"/>
+                </a:solidFill>
+                <a:latin typeface="Times New Roman" panose="02020603050405020304" pitchFamily="18" charset="0"/>
+                <a:cs typeface="Times New Roman" panose="02020603050405020304" pitchFamily="18" charset="0"/>
+              </a:rPr>
+              <a:t> </a:t>
+            </a:r>
+            <a:r>
+              <a:rPr lang="en-US" sz="1400" b="1" dirty="0">
+                <a:solidFill>
+                  <a:schemeClr val="bg1"/>
+                </a:solidFill>
+                <a:effectLst/>
+                <a:latin typeface="Times New Roman" panose="02020603050405020304" pitchFamily="18" charset="0"/>
+                <a:ea typeface="KaiTi" panose="02010609060101010101" pitchFamily="49" charset="-122"/>
+              </a:rPr>
+              <a:t>Issue a circular </a:t>
+            </a:r>
+            <a:endParaRPr lang="en-CN" sz="1400" b="1" dirty="0">
+              <a:solidFill>
+                <a:schemeClr val="bg1"/>
+              </a:solidFill>
+              <a:latin typeface="Times New Roman" panose="02020603050405020304" pitchFamily="18" charset="0"/>
+              <a:cs typeface="Times New Roman" panose="02020603050405020304" pitchFamily="18" charset="0"/>
+            </a:endParaRPr>
+          </a:p>
+        </p:txBody>
+      </p:sp>
+      <p:cxnSp>
+        <p:nvCxnSpPr>
+          <p:cNvPr id="35" name="Straight Arrow Connector 34">
+            <a:extLst>
+              <a:ext uri="{FF2B5EF4-FFF2-40B4-BE49-F238E27FC236}">
+                <a16:creationId xmlns:a16="http://schemas.microsoft.com/office/drawing/2014/main" id="{5D07BA8A-F670-7247-87BF-54D416346CBE}"/>
+              </a:ext>
+            </a:extLst>
+          </p:cNvPr>
+          <p:cNvCxnSpPr>
+            <a:cxnSpLocks/>
+          </p:cNvCxnSpPr>
+          <p:nvPr/>
+        </p:nvCxnSpPr>
+        <p:spPr>
+          <a:xfrm>
+            <a:off x="6431414" y="3280908"/>
+            <a:ext cx="402523" cy="399622"/>
+          </a:xfrm>
+          <a:prstGeom prst="straightConnector1">
+            <a:avLst/>
+          </a:prstGeom>
+          <a:ln w="12700">
+            <a:solidFill>
+              <a:schemeClr val="bg1"/>
+            </a:solidFill>
+            <a:tailEnd type="stealth"/>
+          </a:ln>
+        </p:spPr>
+        <p:style>
+          <a:lnRef idx="1">
+            <a:schemeClr val="accent1"/>
+          </a:lnRef>
+          <a:fillRef idx="0">
+            <a:schemeClr val="accent1"/>
+          </a:fillRef>
+          <a:effectRef idx="0">
+            <a:schemeClr val="accent1"/>
+          </a:effectRef>
+          <a:fontRef idx="minor">
+            <a:schemeClr val="tx1"/>
+          </a:fontRef>
+        </p:style>
+      </p:cxnSp>
+      <p:sp>
+        <p:nvSpPr>
+          <p:cNvPr id="38" name="Oval 37">
+            <a:extLst>
+              <a:ext uri="{FF2B5EF4-FFF2-40B4-BE49-F238E27FC236}">
+                <a16:creationId xmlns:a16="http://schemas.microsoft.com/office/drawing/2014/main" id="{2134F66B-237E-1547-88A9-E51BA5968ACF}"/>
+              </a:ext>
+            </a:extLst>
+          </p:cNvPr>
+          <p:cNvSpPr/>
+          <p:nvPr/>
+        </p:nvSpPr>
+        <p:spPr>
+          <a:xfrm>
+            <a:off x="6460289" y="2711450"/>
+            <a:ext cx="402523" cy="399622"/>
+          </a:xfrm>
+          <a:prstGeom prst="ellipse">
+            <a:avLst/>
+          </a:prstGeom>
+          <a:noFill/>
+          <a:ln w="19050">
+            <a:solidFill>
+              <a:schemeClr val="bg1"/>
+            </a:solidFill>
+          </a:ln>
+        </p:spPr>
+        <p:style>
+          <a:lnRef idx="2">
+            <a:schemeClr val="accent1">
+              <a:shade val="50000"/>
+            </a:schemeClr>
+          </a:lnRef>
+          <a:fillRef idx="1">
+            <a:schemeClr val="accent1"/>
+          </a:fillRef>
+          <a:effectRef idx="0">
+            <a:schemeClr val="accent1"/>
+          </a:effectRef>
+          <a:fontRef idx="minor">
+            <a:schemeClr val="lt1"/>
+          </a:fontRef>
+        </p:style>
+        <p:txBody>
+          <a:bodyPr rtlCol="0" anchor="ctr"/>
+          <a:lstStyle/>
+          <a:p>
+            <a:pPr algn="ctr"/>
+            <a:endParaRPr lang="en-CN"/>
+          </a:p>
+        </p:txBody>
+      </p:sp>
+      <p:cxnSp>
+        <p:nvCxnSpPr>
+          <p:cNvPr id="39" name="Straight Arrow Connector 38">
+            <a:extLst>
+              <a:ext uri="{FF2B5EF4-FFF2-40B4-BE49-F238E27FC236}">
+                <a16:creationId xmlns:a16="http://schemas.microsoft.com/office/drawing/2014/main" id="{130E0E98-FE93-AC4D-91E3-05C2D32D0297}"/>
+              </a:ext>
+            </a:extLst>
+          </p:cNvPr>
+          <p:cNvCxnSpPr>
+            <a:cxnSpLocks/>
+            <a:stCxn id="38" idx="0"/>
+          </p:cNvCxnSpPr>
+          <p:nvPr/>
+        </p:nvCxnSpPr>
+        <p:spPr>
+          <a:xfrm flipV="1">
+            <a:off x="6661551" y="2473693"/>
+            <a:ext cx="806048" cy="237757"/>
+          </a:xfrm>
+          <a:prstGeom prst="straightConnector1">
+            <a:avLst/>
+          </a:prstGeom>
+          <a:ln w="12700">
+            <a:solidFill>
+              <a:schemeClr val="bg1"/>
+            </a:solidFill>
+            <a:tailEnd type="stealth"/>
+          </a:ln>
+        </p:spPr>
+        <p:style>
+          <a:lnRef idx="1">
+            <a:schemeClr val="accent1"/>
+          </a:lnRef>
+          <a:fillRef idx="0">
+            <a:schemeClr val="accent1"/>
+          </a:fillRef>
+          <a:effectRef idx="0">
+            <a:schemeClr val="accent1"/>
+          </a:effectRef>
+          <a:fontRef idx="minor">
+            <a:schemeClr val="tx1"/>
+          </a:fontRef>
+        </p:style>
+      </p:cxnSp>
+      <p:sp>
+        <p:nvSpPr>
+          <p:cNvPr id="42" name="TextBox 41">
+            <a:extLst>
+              <a:ext uri="{FF2B5EF4-FFF2-40B4-BE49-F238E27FC236}">
+                <a16:creationId xmlns:a16="http://schemas.microsoft.com/office/drawing/2014/main" id="{64C41634-2D17-2746-BC7A-552166FA92AC}"/>
+              </a:ext>
+            </a:extLst>
+          </p:cNvPr>
+          <p:cNvSpPr txBox="1"/>
+          <p:nvPr/>
+        </p:nvSpPr>
+        <p:spPr>
+          <a:xfrm>
+            <a:off x="6208369" y="1790031"/>
+            <a:ext cx="2033873" cy="523220"/>
+          </a:xfrm>
+          <a:prstGeom prst="rect">
+            <a:avLst/>
+          </a:prstGeom>
+          <a:noFill/>
+        </p:spPr>
+        <p:txBody>
+          <a:bodyPr wrap="square" rtlCol="0">
+            <a:spAutoFit/>
+          </a:bodyPr>
+          <a:lstStyle/>
+          <a:p>
+            <a:pPr algn="ctr"/>
+            <a:r>
+              <a:rPr lang="en-US" altLang="zh-CN" sz="1400" b="1" dirty="0">
+                <a:solidFill>
+                  <a:schemeClr val="bg1"/>
+                </a:solidFill>
+                <a:latin typeface="Times New Roman" panose="02020603050405020304" pitchFamily="18" charset="0"/>
+                <a:cs typeface="Times New Roman" panose="02020603050405020304" pitchFamily="18" charset="0"/>
+              </a:rPr>
+              <a:t>10.22 &amp; 23</a:t>
+            </a:r>
+            <a:r>
+              <a:rPr lang="zh-CN" altLang="en-US" sz="1400" b="1" dirty="0">
+                <a:solidFill>
+                  <a:schemeClr val="bg1"/>
+                </a:solidFill>
+                <a:latin typeface="Times New Roman" panose="02020603050405020304" pitchFamily="18" charset="0"/>
+                <a:cs typeface="Times New Roman" panose="02020603050405020304" pitchFamily="18" charset="0"/>
+              </a:rPr>
+              <a:t> </a:t>
+            </a:r>
+            <a:endParaRPr lang="en-US" altLang="zh-CN" sz="1400" b="1" dirty="0">
+              <a:solidFill>
+                <a:schemeClr val="bg1"/>
+              </a:solidFill>
+              <a:latin typeface="Times New Roman" panose="02020603050405020304" pitchFamily="18" charset="0"/>
+              <a:cs typeface="Times New Roman" panose="02020603050405020304" pitchFamily="18" charset="0"/>
+            </a:endParaRPr>
+          </a:p>
+          <a:p>
+            <a:pPr algn="ctr"/>
+            <a:r>
+              <a:rPr lang="en-US" sz="1400" b="1" dirty="0">
+                <a:solidFill>
+                  <a:schemeClr val="bg1"/>
+                </a:solidFill>
+                <a:latin typeface="Times New Roman" panose="02020603050405020304" pitchFamily="18" charset="0"/>
+                <a:ea typeface="KaiTi" panose="02010609060101010101" pitchFamily="49" charset="-122"/>
+              </a:rPr>
+              <a:t>Fi</a:t>
+            </a:r>
+            <a:r>
+              <a:rPr lang="en-US" sz="1400" b="1" dirty="0">
+                <a:solidFill>
+                  <a:schemeClr val="bg1"/>
+                </a:solidFill>
+                <a:effectLst/>
+                <a:latin typeface="Times New Roman" panose="02020603050405020304" pitchFamily="18" charset="0"/>
+                <a:ea typeface="KaiTi" panose="02010609060101010101" pitchFamily="49" charset="-122"/>
+              </a:rPr>
+              <a:t>rst </a:t>
+            </a:r>
+            <a:r>
+              <a:rPr lang="en-US" sz="1400" b="1" dirty="0">
+                <a:solidFill>
+                  <a:schemeClr val="bg1"/>
+                </a:solidFill>
+                <a:latin typeface="Times New Roman" panose="02020603050405020304" pitchFamily="18" charset="0"/>
+                <a:ea typeface="KaiTi" panose="02010609060101010101" pitchFamily="49" charset="-122"/>
+              </a:rPr>
+              <a:t>O</a:t>
+            </a:r>
+            <a:r>
+              <a:rPr lang="en-US" sz="1400" b="1" dirty="0">
+                <a:solidFill>
+                  <a:schemeClr val="bg1"/>
+                </a:solidFill>
+                <a:effectLst/>
+                <a:latin typeface="Times New Roman" panose="02020603050405020304" pitchFamily="18" charset="0"/>
+                <a:ea typeface="KaiTi" panose="02010609060101010101" pitchFamily="49" charset="-122"/>
+              </a:rPr>
+              <a:t>peration</a:t>
+            </a:r>
+            <a:r>
+              <a:rPr lang="zh-CN" altLang="en-US" sz="1400" b="1" dirty="0">
+                <a:solidFill>
+                  <a:schemeClr val="bg1"/>
+                </a:solidFill>
+                <a:effectLst/>
+                <a:latin typeface="Times New Roman" panose="02020603050405020304" pitchFamily="18" charset="0"/>
+                <a:ea typeface="KaiTi" panose="02010609060101010101" pitchFamily="49" charset="-122"/>
+              </a:rPr>
+              <a:t> </a:t>
+            </a:r>
+            <a:r>
+              <a:rPr lang="en-US" altLang="zh-CN" sz="1400" b="1" dirty="0">
+                <a:solidFill>
+                  <a:schemeClr val="bg1"/>
+                </a:solidFill>
+                <a:latin typeface="Times New Roman" panose="02020603050405020304" pitchFamily="18" charset="0"/>
+                <a:ea typeface="KaiTi" panose="02010609060101010101" pitchFamily="49" charset="-122"/>
+              </a:rPr>
+              <a:t>Works</a:t>
+            </a:r>
+            <a:endParaRPr lang="en-CN" sz="1400" b="1" dirty="0">
+              <a:solidFill>
+                <a:schemeClr val="bg1"/>
+              </a:solidFill>
+              <a:latin typeface="Times New Roman" panose="02020603050405020304" pitchFamily="18" charset="0"/>
+              <a:cs typeface="Times New Roman" panose="02020603050405020304" pitchFamily="18" charset="0"/>
+            </a:endParaRPr>
+          </a:p>
+        </p:txBody>
+      </p:sp>
+      <p:sp>
+        <p:nvSpPr>
+          <p:cNvPr id="46" name="TextBox 45">
+            <a:extLst>
+              <a:ext uri="{FF2B5EF4-FFF2-40B4-BE49-F238E27FC236}">
+                <a16:creationId xmlns:a16="http://schemas.microsoft.com/office/drawing/2014/main" id="{2043E101-44DE-D84A-B8E1-2DB450F746AD}"/>
+              </a:ext>
+            </a:extLst>
+          </p:cNvPr>
+          <p:cNvSpPr txBox="1"/>
+          <p:nvPr/>
+        </p:nvSpPr>
+        <p:spPr>
+          <a:xfrm>
+            <a:off x="8379146" y="5575851"/>
+            <a:ext cx="3190122" cy="323165"/>
+          </a:xfrm>
+          <a:prstGeom prst="rect">
+            <a:avLst/>
+          </a:prstGeom>
+          <a:noFill/>
+        </p:spPr>
+        <p:txBody>
+          <a:bodyPr wrap="square" rtlCol="0">
+            <a:spAutoFit/>
+          </a:bodyPr>
+          <a:lstStyle/>
+          <a:p>
+            <a:pPr algn="r"/>
+            <a:r>
+              <a:rPr lang="en-US" altLang="zh-CN" sz="1500" b="1" dirty="0">
+                <a:solidFill>
+                  <a:schemeClr val="accent4"/>
+                </a:solidFill>
+                <a:latin typeface="Times New Roman" panose="02020603050405020304" pitchFamily="18" charset="0"/>
+                <a:cs typeface="Times New Roman" panose="02020603050405020304" pitchFamily="18" charset="0"/>
+              </a:rPr>
+              <a:t>Long-term effects remain to be seen.</a:t>
+            </a:r>
+            <a:endParaRPr lang="en-CN" sz="1500" b="1" dirty="0">
+              <a:solidFill>
+                <a:schemeClr val="accent4"/>
+              </a:solidFill>
+              <a:latin typeface="Times New Roman" panose="02020603050405020304" pitchFamily="18" charset="0"/>
+              <a:cs typeface="Times New Roman" panose="02020603050405020304" pitchFamily="18" charset="0"/>
+            </a:endParaRPr>
+          </a:p>
+        </p:txBody>
+      </p:sp>
+      <p:sp>
+        <p:nvSpPr>
+          <p:cNvPr id="50" name="TextBox 49">
+            <a:extLst>
+              <a:ext uri="{FF2B5EF4-FFF2-40B4-BE49-F238E27FC236}">
+                <a16:creationId xmlns:a16="http://schemas.microsoft.com/office/drawing/2014/main" id="{79A49A91-4612-8C49-9546-81FF2EB011AD}"/>
+              </a:ext>
+            </a:extLst>
+          </p:cNvPr>
+          <p:cNvSpPr txBox="1"/>
+          <p:nvPr/>
+        </p:nvSpPr>
+        <p:spPr>
+          <a:xfrm>
+            <a:off x="5037614" y="5590640"/>
+            <a:ext cx="3190122" cy="323165"/>
+          </a:xfrm>
+          <a:prstGeom prst="rect">
+            <a:avLst/>
+          </a:prstGeom>
+          <a:noFill/>
+        </p:spPr>
+        <p:txBody>
+          <a:bodyPr wrap="square" rtlCol="0">
+            <a:spAutoFit/>
+          </a:bodyPr>
+          <a:lstStyle/>
+          <a:p>
+            <a:pPr algn="r"/>
+            <a:r>
+              <a:rPr lang="en-US" altLang="zh-CN" sz="1500" b="1" dirty="0">
+                <a:solidFill>
+                  <a:schemeClr val="accent4"/>
+                </a:solidFill>
+                <a:latin typeface="Times New Roman" panose="02020603050405020304" pitchFamily="18" charset="0"/>
+                <a:cs typeface="Times New Roman" panose="02020603050405020304" pitchFamily="18" charset="0"/>
+              </a:rPr>
+              <a:t>Short-term effects are clear.</a:t>
+            </a:r>
+            <a:endParaRPr lang="en-CN" sz="1500" b="1" dirty="0">
+              <a:solidFill>
+                <a:schemeClr val="accent4"/>
+              </a:solidFill>
+              <a:latin typeface="Times New Roman" panose="02020603050405020304" pitchFamily="18" charset="0"/>
+              <a:cs typeface="Times New Roman" panose="02020603050405020304" pitchFamily="18" charset="0"/>
+            </a:endParaRPr>
+          </a:p>
+        </p:txBody>
+      </p:sp>
+      <p:sp>
+        <p:nvSpPr>
+          <p:cNvPr id="51" name="TextBox 50">
+            <a:extLst>
+              <a:ext uri="{FF2B5EF4-FFF2-40B4-BE49-F238E27FC236}">
+                <a16:creationId xmlns:a16="http://schemas.microsoft.com/office/drawing/2014/main" id="{DD4AD68D-71EF-4540-8294-7A778BFC6EE7}"/>
+              </a:ext>
+            </a:extLst>
+          </p:cNvPr>
+          <p:cNvSpPr txBox="1"/>
+          <p:nvPr/>
+        </p:nvSpPr>
+        <p:spPr>
+          <a:xfrm>
+            <a:off x="443207" y="5590639"/>
+            <a:ext cx="3190122" cy="323165"/>
+          </a:xfrm>
+          <a:prstGeom prst="rect">
+            <a:avLst/>
+          </a:prstGeom>
+          <a:noFill/>
+        </p:spPr>
+        <p:txBody>
+          <a:bodyPr wrap="square" rtlCol="0">
+            <a:spAutoFit/>
+          </a:bodyPr>
+          <a:lstStyle/>
+          <a:p>
+            <a:pPr algn="r"/>
+            <a:r>
+              <a:rPr lang="en-US" altLang="zh-CN" sz="1500" b="1" dirty="0">
+                <a:solidFill>
+                  <a:schemeClr val="accent4"/>
+                </a:solidFill>
+                <a:latin typeface="Times New Roman" panose="02020603050405020304" pitchFamily="18" charset="0"/>
+                <a:cs typeface="Times New Roman" panose="02020603050405020304" pitchFamily="18" charset="0"/>
+              </a:rPr>
+              <a:t>The market continued to be sluggish.</a:t>
+            </a:r>
+            <a:endParaRPr lang="en-CN" sz="1500" b="1" dirty="0">
+              <a:solidFill>
+                <a:schemeClr val="accent4"/>
+              </a:solidFill>
+              <a:latin typeface="Times New Roman" panose="02020603050405020304" pitchFamily="18" charset="0"/>
+              <a:cs typeface="Times New Roman" panose="02020603050405020304" pitchFamily="18" charset="0"/>
+            </a:endParaRPr>
+          </a:p>
+        </p:txBody>
+      </p:sp>
     </p:spTree>
     <p:extLst>
       <p:ext uri="{BB962C8B-B14F-4D97-AF65-F5344CB8AC3E}">
-        <p14:creationId xmlns:p14="http://schemas.microsoft.com/office/powerpoint/2010/main" val="2896180752"/>
+        <p14:creationId xmlns:p14="http://schemas.microsoft.com/office/powerpoint/2010/main" val="3212188610"/>
       </p:ext>
     </p:extLst>
   </p:cSld>

--- a/HomeWorks/homework1/images.pptx
+++ b/HomeWorks/homework1/images.pptx
@@ -264,7 +264,7 @@
           <a:p>
             <a:fld id="{322E4AA4-BEDE-CB44-B2CC-66E1D385BA6A}" type="datetimeFigureOut">
               <a:rPr lang="en-CN" smtClean="0"/>
-              <a:t>2024/12/9</a:t>
+              <a:t>2024/12/10</a:t>
             </a:fld>
             <a:endParaRPr lang="en-CN"/>
           </a:p>
@@ -464,7 +464,7 @@
           <a:p>
             <a:fld id="{322E4AA4-BEDE-CB44-B2CC-66E1D385BA6A}" type="datetimeFigureOut">
               <a:rPr lang="en-CN" smtClean="0"/>
-              <a:t>2024/12/9</a:t>
+              <a:t>2024/12/10</a:t>
             </a:fld>
             <a:endParaRPr lang="en-CN"/>
           </a:p>
@@ -674,7 +674,7 @@
           <a:p>
             <a:fld id="{322E4AA4-BEDE-CB44-B2CC-66E1D385BA6A}" type="datetimeFigureOut">
               <a:rPr lang="en-CN" smtClean="0"/>
-              <a:t>2024/12/9</a:t>
+              <a:t>2024/12/10</a:t>
             </a:fld>
             <a:endParaRPr lang="en-CN"/>
           </a:p>
@@ -874,7 +874,7 @@
           <a:p>
             <a:fld id="{322E4AA4-BEDE-CB44-B2CC-66E1D385BA6A}" type="datetimeFigureOut">
               <a:rPr lang="en-CN" smtClean="0"/>
-              <a:t>2024/12/9</a:t>
+              <a:t>2024/12/10</a:t>
             </a:fld>
             <a:endParaRPr lang="en-CN"/>
           </a:p>
@@ -1150,7 +1150,7 @@
           <a:p>
             <a:fld id="{322E4AA4-BEDE-CB44-B2CC-66E1D385BA6A}" type="datetimeFigureOut">
               <a:rPr lang="en-CN" smtClean="0"/>
-              <a:t>2024/12/9</a:t>
+              <a:t>2024/12/10</a:t>
             </a:fld>
             <a:endParaRPr lang="en-CN"/>
           </a:p>
@@ -1418,7 +1418,7 @@
           <a:p>
             <a:fld id="{322E4AA4-BEDE-CB44-B2CC-66E1D385BA6A}" type="datetimeFigureOut">
               <a:rPr lang="en-CN" smtClean="0"/>
-              <a:t>2024/12/9</a:t>
+              <a:t>2024/12/10</a:t>
             </a:fld>
             <a:endParaRPr lang="en-CN"/>
           </a:p>
@@ -1833,7 +1833,7 @@
           <a:p>
             <a:fld id="{322E4AA4-BEDE-CB44-B2CC-66E1D385BA6A}" type="datetimeFigureOut">
               <a:rPr lang="en-CN" smtClean="0"/>
-              <a:t>2024/12/9</a:t>
+              <a:t>2024/12/10</a:t>
             </a:fld>
             <a:endParaRPr lang="en-CN"/>
           </a:p>
@@ -1975,7 +1975,7 @@
           <a:p>
             <a:fld id="{322E4AA4-BEDE-CB44-B2CC-66E1D385BA6A}" type="datetimeFigureOut">
               <a:rPr lang="en-CN" smtClean="0"/>
-              <a:t>2024/12/9</a:t>
+              <a:t>2024/12/10</a:t>
             </a:fld>
             <a:endParaRPr lang="en-CN"/>
           </a:p>
@@ -2088,7 +2088,7 @@
           <a:p>
             <a:fld id="{322E4AA4-BEDE-CB44-B2CC-66E1D385BA6A}" type="datetimeFigureOut">
               <a:rPr lang="en-CN" smtClean="0"/>
-              <a:t>2024/12/9</a:t>
+              <a:t>2024/12/10</a:t>
             </a:fld>
             <a:endParaRPr lang="en-CN"/>
           </a:p>
@@ -2401,7 +2401,7 @@
           <a:p>
             <a:fld id="{322E4AA4-BEDE-CB44-B2CC-66E1D385BA6A}" type="datetimeFigureOut">
               <a:rPr lang="en-CN" smtClean="0"/>
-              <a:t>2024/12/9</a:t>
+              <a:t>2024/12/10</a:t>
             </a:fld>
             <a:endParaRPr lang="en-CN"/>
           </a:p>
@@ -2690,7 +2690,7 @@
           <a:p>
             <a:fld id="{322E4AA4-BEDE-CB44-B2CC-66E1D385BA6A}" type="datetimeFigureOut">
               <a:rPr lang="en-CN" smtClean="0"/>
-              <a:t>2024/12/9</a:t>
+              <a:t>2024/12/10</a:t>
             </a:fld>
             <a:endParaRPr lang="en-CN"/>
           </a:p>
@@ -2933,7 +2933,7 @@
           <a:p>
             <a:fld id="{322E4AA4-BEDE-CB44-B2CC-66E1D385BA6A}" type="datetimeFigureOut">
               <a:rPr lang="en-CN" smtClean="0"/>
-              <a:t>2024/12/9</a:t>
+              <a:t>2024/12/10</a:t>
             </a:fld>
             <a:endParaRPr lang="en-CN"/>
           </a:p>
@@ -7243,6 +7243,16 @@
                   </a:rPr>
                   <a:t> created by the PBOC specifically for the development of asset capital markets</a:t>
                 </a:r>
+                <a:r>
+                  <a:rPr lang="en-US" altLang="zh-CN" dirty="0">
+                    <a:solidFill>
+                      <a:srgbClr val="000000"/>
+                    </a:solidFill>
+                    <a:latin typeface="Times New Roman" panose="02020603050405020304" pitchFamily="18" charset="0"/>
+                    <a:ea typeface="KaiTi" panose="02010609060101010101" pitchFamily="49" charset="-122"/>
+                  </a:rPr>
+                  <a:t>.</a:t>
+                </a:r>
                 <a:endParaRPr lang="en-CN" dirty="0"/>
               </a:p>
             </p:txBody>
@@ -7306,7 +7316,6 @@
               <a:bodyPr rtlCol="0" anchor="ctr"/>
               <a:lstStyle/>
               <a:p>
-                <a:pPr algn="just"/>
                 <a:r>
                   <a:rPr lang="en-US" dirty="0">
                     <a:solidFill>
@@ -7337,7 +7346,7 @@
                     <a:latin typeface="Times New Roman" panose="02020603050405020304" pitchFamily="18" charset="0"/>
                     <a:ea typeface="KaiTi" panose="02010609060101010101" pitchFamily="49" charset="-122"/>
                   </a:rPr>
-                  <a:t>very helpful to boost the confidence </a:t>
+                  <a:t>helpful to boost the confidence </a:t>
                 </a:r>
                 <a:r>
                   <a:rPr lang="en-US" sz="1800" dirty="0">
@@ -7348,7 +7357,7 @@
                     <a:latin typeface="Times New Roman" panose="02020603050405020304" pitchFamily="18" charset="0"/>
                     <a:ea typeface="KaiTi" panose="02010609060101010101" pitchFamily="49" charset="-122"/>
                   </a:rPr>
-                  <a:t>of the capital market</a:t>
+                  <a:t>of the capital market.</a:t>
                 </a:r>
                 <a:r>
                   <a:rPr lang="en-CN" dirty="0">
@@ -7459,10 +7468,14 @@
                   <a:t>since 9.24</a:t>
                 </a:r>
                 <a:r>
-                  <a:rPr lang="en-CN" dirty="0">
-                    <a:effectLst/>
+                  <a:rPr lang="en-CN" sz="1800" dirty="0">
+                    <a:solidFill>
+                      <a:srgbClr val="000000"/>
+                    </a:solidFill>
+                    <a:latin typeface="Times New Roman" panose="02020603050405020304" pitchFamily="18" charset="0"/>
+                    <a:ea typeface="KaiTi" panose="02010609060101010101" pitchFamily="49" charset="-122"/>
                   </a:rPr>
-                  <a:t> </a:t>
+                  <a:t>.</a:t>
                 </a:r>
                 <a:endParaRPr lang="en-CN" dirty="0"/>
               </a:p>
